--- a/Presentation/Pf_ErickBanegas_ITAI2376.pptx
+++ b/Presentation/Pf_ErickBanegas_ITAI2376.pptx
@@ -4,6 +4,9 @@
   <p:sldMasterIdLst>
     <p:sldMasterId id="2147483648" r:id="rId1"/>
   </p:sldMasterIdLst>
+  <p:notesMasterIdLst>
+    <p:notesMasterId r:id="rId7"/>
+  </p:notesMasterIdLst>
   <p:sldIdLst>
     <p:sldId id="256" r:id="rId2"/>
     <p:sldId id="257" r:id="rId3"/>
@@ -11,10 +14,7 @@
     <p:sldId id="259" r:id="rId5"/>
     <p:sldId id="260" r:id="rId6"/>
   </p:sldIdLst>
-  <p:notesMasterIdLst>
-    <p:notesMasterId r:id="rId7"/>
-  </p:notesMasterIdLst>
-  <p:sldSz cx="9144000" cy="5143500"/>
+  <p:sldSz cx="9144000" cy="5143500" type="screen16x9"/>
   <p:notesSz cx="5143500" cy="9144000"/>
   <p:defaultTextStyle>
     <a:lvl1pPr marL="0" algn="l" defTabSz="914400" rtl="0" eaLnBrk="1" latinLnBrk="0" hangingPunct="1">
@@ -108,6 +108,11 @@
       </a:defRPr>
     </a:lvl9pPr>
   </p:defaultTextStyle>
+  <p:extLst>
+    <p:ext uri="{EFAFB233-063F-42B5-8137-9DF3F51BA10A}">
+      <p15:sldGuideLst xmlns:p15="http://schemas.microsoft.com/office/powerpoint/2012/main"/>
+    </p:ext>
+  </p:extLst>
 </p:presentation>
 </file>
 
@@ -133,234 +138,10 @@
           <a:chExt cx="0" cy="0"/>
         </a:xfrm>
       </p:grpSpPr>
-      <p:sp>
-        <p:nvSpPr>
-          <p:cNvPr id="2" name="Header Placeholder 1"/>
-          <p:cNvSpPr>
-            <a:spLocks noGrp="1"/>
-          </p:cNvSpPr>
-          <p:nvPr>
-            <p:ph type="hdr" sz="quarter"/>
-          </p:nvPr>
-        </p:nvSpPr>
-        <p:spPr>
-          <a:xfrm>
-            <a:off x="0" y="0"/>
-            <a:ext cx="2971800" cy="458788"/>
-          </a:xfrm>
-          <a:prstGeom prst="rect">
-            <a:avLst/>
-          </a:prstGeom>
-        </p:spPr>
-        <p:txBody>
-          <a:bodyPr vert="horz" lIns="91440" tIns="45720" rIns="91440" bIns="45720" rtlCol="0"/>
-          <a:lstStyle>
-            <a:lvl1pPr algn="l">
-              <a:defRPr sz="1200"/>
-            </a:lvl1pPr>
-          </a:lstStyle>
-          <a:p>
-            <a:endParaRPr lang="en-US"/>
-          </a:p>
-        </p:txBody>
-      </p:sp>
-      <p:sp>
-        <p:nvSpPr>
-          <p:cNvPr id="3" name="Date Placeholder 2"/>
-          <p:cNvSpPr>
-            <a:spLocks noGrp="1"/>
-          </p:cNvSpPr>
-          <p:nvPr>
-            <p:ph type="dt" idx="1"/>
-          </p:nvPr>
-        </p:nvSpPr>
-        <p:spPr>
-          <a:xfrm>
-            <a:off x="3884613" y="0"/>
-            <a:ext cx="2971800" cy="458788"/>
-          </a:xfrm>
-          <a:prstGeom prst="rect">
-            <a:avLst/>
-          </a:prstGeom>
-        </p:spPr>
-        <p:txBody>
-          <a:bodyPr vert="horz" lIns="91440" tIns="45720" rIns="91440" bIns="45720" rtlCol="0"/>
-          <a:lstStyle>
-            <a:lvl1pPr algn="r">
-              <a:defRPr sz="1200"/>
-            </a:lvl1pPr>
-          </a:lstStyle>
-          <a:p>
-            <a:fld id="{5282F153-3F37-0F45-9E97-73ACFA13230C}" type="datetimeFigureOut">
-              <a:rPr lang="en-US"/>
-              <a:t>7/23/19</a:t>
-            </a:fld>
-            <a:endParaRPr lang="en-US"/>
-          </a:p>
-        </p:txBody>
-      </p:sp>
-      <p:sp>
-        <p:nvSpPr>
-          <p:cNvPr id="4" name="Slide Image Placeholder 3"/>
-          <p:cNvSpPr>
-            <a:spLocks noGrp="1" noRot="1" noChangeAspect="1"/>
-          </p:cNvSpPr>
-          <p:nvPr>
-            <p:ph type="sldImg" idx="2"/>
-          </p:nvPr>
-        </p:nvSpPr>
-        <p:spPr>
-          <a:xfrm>
-            <a:off x="685800" y="1143000"/>
-            <a:ext cx="5486400" cy="3086100"/>
-          </a:xfrm>
-          <a:prstGeom prst="rect">
-            <a:avLst/>
-          </a:prstGeom>
-          <a:noFill/>
-          <a:ln w="12700">
-            <a:solidFill>
-              <a:prstClr val="black"/>
-            </a:solidFill>
-          </a:ln>
-        </p:spPr>
-        <p:txBody>
-          <a:bodyPr vert="horz" lIns="91440" tIns="45720" rIns="91440" bIns="45720" rtlCol="0" anchor="ctr"/>
-          <a:lstStyle/>
-          <a:p>
-            <a:endParaRPr lang="en-US"/>
-          </a:p>
-        </p:txBody>
-      </p:sp>
-      <p:sp>
-        <p:nvSpPr>
-          <p:cNvPr id="5" name="Notes Placeholder 4"/>
-          <p:cNvSpPr>
-            <a:spLocks noGrp="1"/>
-          </p:cNvSpPr>
-          <p:nvPr>
-            <p:ph type="body" sz="quarter" idx="3"/>
-          </p:nvPr>
-        </p:nvSpPr>
-        <p:spPr>
-          <a:xfrm>
-            <a:off x="685800" y="4400550"/>
-            <a:ext cx="5486400" cy="3600450"/>
-          </a:xfrm>
-          <a:prstGeom prst="rect">
-            <a:avLst/>
-          </a:prstGeom>
-        </p:spPr>
-        <p:txBody>
-          <a:bodyPr vert="horz" lIns="91440" tIns="45720" rIns="91440" bIns="45720" rtlCol="0"/>
-          <a:lstStyle/>
-          <a:p>
-            <a:pPr lvl="0"/>
-            <a:r>
-              <a:rPr lang="en-US"/>
-              <a:t>Click to edit Master text styles</a:t>
-            </a:r>
-          </a:p>
-          <a:p>
-            <a:pPr lvl="1"/>
-            <a:r>
-              <a:rPr lang="en-US"/>
-              <a:t>Second level</a:t>
-            </a:r>
-          </a:p>
-          <a:p>
-            <a:pPr lvl="2"/>
-            <a:r>
-              <a:rPr lang="en-US"/>
-              <a:t>Third level</a:t>
-            </a:r>
-          </a:p>
-          <a:p>
-            <a:pPr lvl="3"/>
-            <a:r>
-              <a:rPr lang="en-US"/>
-              <a:t>Fourth level</a:t>
-            </a:r>
-          </a:p>
-          <a:p>
-            <a:pPr lvl="4"/>
-            <a:r>
-              <a:rPr lang="en-US"/>
-              <a:t>Fifth level</a:t>
-            </a:r>
-          </a:p>
-        </p:txBody>
-      </p:sp>
-      <p:sp>
-        <p:nvSpPr>
-          <p:cNvPr id="6" name="Footer Placeholder 5"/>
-          <p:cNvSpPr>
-            <a:spLocks noGrp="1"/>
-          </p:cNvSpPr>
-          <p:nvPr>
-            <p:ph type="ftr" sz="quarter" idx="4"/>
-          </p:nvPr>
-        </p:nvSpPr>
-        <p:spPr>
-          <a:xfrm>
-            <a:off x="0" y="8685213"/>
-            <a:ext cx="2971800" cy="458787"/>
-          </a:xfrm>
-          <a:prstGeom prst="rect">
-            <a:avLst/>
-          </a:prstGeom>
-        </p:spPr>
-        <p:txBody>
-          <a:bodyPr vert="horz" lIns="91440" tIns="45720" rIns="91440" bIns="45720" rtlCol="0" anchor="b"/>
-          <a:lstStyle>
-            <a:lvl1pPr algn="l">
-              <a:defRPr sz="1200"/>
-            </a:lvl1pPr>
-          </a:lstStyle>
-          <a:p>
-            <a:endParaRPr lang="en-US"/>
-          </a:p>
-        </p:txBody>
-      </p:sp>
-      <p:sp>
-        <p:nvSpPr>
-          <p:cNvPr id="7" name="Slide Number Placeholder 6"/>
-          <p:cNvSpPr>
-            <a:spLocks noGrp="1"/>
-          </p:cNvSpPr>
-          <p:nvPr>
-            <p:ph type="sldNum" sz="quarter" idx="5"/>
-          </p:nvPr>
-        </p:nvSpPr>
-        <p:spPr>
-          <a:xfrm>
-            <a:off x="3884613" y="8685213"/>
-            <a:ext cx="2971800" cy="458787"/>
-          </a:xfrm>
-          <a:prstGeom prst="rect">
-            <a:avLst/>
-          </a:prstGeom>
-        </p:spPr>
-        <p:txBody>
-          <a:bodyPr vert="horz" lIns="91440" tIns="45720" rIns="91440" bIns="45720" rtlCol="0" anchor="b"/>
-          <a:lstStyle>
-            <a:lvl1pPr algn="r">
-              <a:defRPr sz="1200"/>
-            </a:lvl1pPr>
-          </a:lstStyle>
-          <a:p>
-            <a:fld id="{CE5E9CC1-C706-0F49-92D6-E571CC5EEA8F}" type="slidenum">
-              <a:rPr lang="en-US"/>
-              <a:t>‹#›</a:t>
-            </a:fld>
-            <a:endParaRPr lang="en-US"/>
-          </a:p>
-        </p:txBody>
-      </p:sp>
     </p:spTree>
     <p:extLst>
       <p:ext uri="{BB962C8B-B14F-4D97-AF65-F5344CB8AC3E}">
-        <p14:creationId xmlns:p14="http://schemas.microsoft.com/office/powerpoint/2010/main" val="1024086991"/>
+        <p14:creationId xmlns:p14="http://schemas.microsoft.com/office/powerpoint/2010/main" val="3108635141"/>
       </p:ext>
     </p:extLst>
   </p:cSld>
@@ -504,10 +285,6 @@
           <a:bodyPr/>
           <a:lstStyle/>
           <a:p>
-            <a:r>
-              <a:rPr lang="en-US" dirty="0"/>
-              <a:t/>
-            </a:r>
             <a:endParaRPr lang="en-US" dirty="0"/>
           </a:p>
         </p:txBody>
@@ -592,10 +369,6 @@
           <a:bodyPr/>
           <a:lstStyle/>
           <a:p>
-            <a:r>
-              <a:rPr lang="en-US" dirty="0"/>
-              <a:t/>
-            </a:r>
             <a:endParaRPr lang="en-US" dirty="0"/>
           </a:p>
         </p:txBody>
@@ -680,10 +453,6 @@
           <a:bodyPr/>
           <a:lstStyle/>
           <a:p>
-            <a:r>
-              <a:rPr lang="en-US" dirty="0"/>
-              <a:t/>
-            </a:r>
             <a:endParaRPr lang="en-US" dirty="0"/>
           </a:p>
         </p:txBody>
@@ -768,10 +537,6 @@
           <a:bodyPr/>
           <a:lstStyle/>
           <a:p>
-            <a:r>
-              <a:rPr lang="en-US" dirty="0"/>
-              <a:t/>
-            </a:r>
             <a:endParaRPr lang="en-US" dirty="0"/>
           </a:p>
         </p:txBody>
@@ -856,10 +621,6 @@
           <a:bodyPr/>
           <a:lstStyle/>
           <a:p>
-            <a:r>
-              <a:rPr lang="en-US" dirty="0"/>
-              <a:t/>
-            </a:r>
             <a:endParaRPr lang="en-US" dirty="0"/>
           </a:p>
         </p:txBody>
@@ -933,6 +694,11 @@
 <file path=ppt/slideMasters/slideMaster1.xml><?xml version="1.0" encoding="utf-8"?>
 <p:sldMaster xmlns:a="http://schemas.openxmlformats.org/drawingml/2006/main" xmlns:r="http://schemas.openxmlformats.org/officeDocument/2006/relationships" xmlns:p="http://schemas.openxmlformats.org/presentationml/2006/main">
   <p:cSld>
+    <p:bg>
+      <p:bgRef idx="1001">
+        <a:schemeClr val="bg1"/>
+      </p:bgRef>
+    </p:bg>
     <p:spTree>
       <p:nvGrpSpPr>
         <p:cNvPr id="1" name=""/>
@@ -1215,6 +981,7 @@
         <a:solidFill>
           <a:srgbClr val="0A1628"/>
         </a:solidFill>
+        <a:effectLst/>
       </p:bgPr>
     </p:bg>
     <p:spTree>
@@ -1250,6 +1017,13 @@
           </a:solidFill>
           <a:ln/>
         </p:spPr>
+        <p:txBody>
+          <a:bodyPr/>
+          <a:lstStyle/>
+          <a:p>
+            <a:endParaRPr lang="en-US"/>
+          </a:p>
+        </p:txBody>
       </p:sp>
       <p:sp>
         <p:nvSpPr>
@@ -1272,11 +1046,11 @@
           <a:bodyPr wrap="square" lIns="0" tIns="0" rIns="0" bIns="0" rtlCol="0" anchor="ctr"/>
           <a:lstStyle/>
           <a:p>
-            <a:pPr indent="0" marL="0">
-              <a:buNone/>
-            </a:pPr>
-            <a:r>
-              <a:rPr lang="en-US" sz="4000" b="1" spc="300" kern="0" dirty="0">
+            <a:pPr marL="0" indent="0">
+              <a:buNone/>
+            </a:pPr>
+            <a:r>
+              <a:rPr lang="en-US" sz="4000" b="1" kern="0" spc="300" dirty="0">
                 <a:solidFill>
                   <a:srgbClr val="FFFFFF"/>
                 </a:solidFill>
@@ -1311,7 +1085,7 @@
           <a:bodyPr wrap="square" lIns="0" tIns="0" rIns="0" bIns="0" rtlCol="0" anchor="ctr"/>
           <a:lstStyle/>
           <a:p>
-            <a:pPr indent="0" marL="0">
+            <a:pPr marL="0" indent="0">
               <a:buNone/>
             </a:pPr>
             <a:r>
@@ -1350,7 +1124,7 @@
           <a:bodyPr wrap="square" lIns="0" tIns="0" rIns="0" bIns="0" rtlCol="0" anchor="ctr"/>
           <a:lstStyle/>
           <a:p>
-            <a:pPr indent="0" marL="0">
+            <a:pPr marL="0" indent="0">
               <a:buNone/>
             </a:pPr>
             <a:r>
@@ -1367,7 +1141,7 @@
             <a:endParaRPr lang="en-US" sz="1400" dirty="0"/>
           </a:p>
           <a:p>
-            <a:pPr indent="0" marL="0">
+            <a:pPr marL="0" indent="0">
               <a:buNone/>
             </a:pPr>
             <a:r>
@@ -1387,79 +1161,7 @@
       </p:sp>
       <p:pic>
         <p:nvPicPr>
-          <p:cNvPr id="6" name="Image 0" descr="preencoded.png">    </p:cNvPr>
-          <p:cNvPicPr>
-            <a:picLocks noChangeAspect="1"/>
-          </p:cNvPicPr>
-          <p:nvPr/>
-        </p:nvPicPr>
-        <p:blipFill>
-          <a:blip r:embed="rId1"/>
-          <a:stretch>
-            <a:fillRect/>
-          </a:stretch>
-        </p:blipFill>
-        <p:spPr>
-          <a:xfrm>
-            <a:off x="640080" y="3657600"/>
-            <a:ext cx="274320" cy="274320"/>
-          </a:xfrm>
-          <a:prstGeom prst="rect">
-            <a:avLst/>
-          </a:prstGeom>
-        </p:spPr>
-      </p:pic>
-      <p:sp>
-        <p:nvSpPr>
-          <p:cNvPr id="7" name="Text 4">
-            <a:hlinkClick r:id="rId2" tooltip=""/>
-          </p:cNvPr>
-          <p:cNvSpPr/>
-          <p:nvPr/>
-        </p:nvSpPr>
-        <p:spPr>
-          <a:xfrm>
-            <a:off x="1005840" y="3657600"/>
-            <a:ext cx="4572000" cy="274320"/>
-          </a:xfrm>
-          <a:prstGeom prst="rect">
-            <a:avLst/>
-          </a:prstGeom>
-          <a:noFill/>
-          <a:ln/>
-        </p:spPr>
-        <p:txBody>
-          <a:bodyPr wrap="square" lIns="0" tIns="0" rIns="0" bIns="0" rtlCol="0" anchor="ctr"/>
-          <a:lstStyle/>
-          <a:p>
-            <a:pPr indent="0" marL="0">
-              <a:buNone/>
-            </a:pPr>
-            <a:r>
-              <a:rPr lang="en-US" sz="1200" u="sng" dirty="0">
-                <a:solidFill>
-                  <a:srgbClr val="06B6D4"/>
-                </a:solidFill>
-                <a:latin typeface="Calibri" pitchFamily="34" charset="0"/>
-                <a:ea typeface="Calibri" pitchFamily="34" charset="-122"/>
-                <a:cs typeface="Calibri" pitchFamily="34" charset="-120"/>
-                <a:hlinkClick r:id="rId2" invalidUrl="" action="" tgtFrame="" tooltip="" history="1" highlightClick="0" endSnd="0">
-                  <a:extLst>
-                    <a:ext uri="{A12FA001-AC4F-418D-AE19-62706E023703}">
-                      <ahyp:hlinkClr xmlns:ahyp="http://schemas.microsoft.com/office/drawing/2018/hyperlinkcolor" val="tx"/>
-                    </a:ext>
-                  </a:extLst>
-                </a:hlinkClick>
-              </a:rPr>
-              <a:t>github.com/erickxllx/Erick-Banegas-AI-Portfolio</a:t>
-            </a:r>
-            <a:endParaRPr lang="en-US" sz="1200" dirty="0"/>
-          </a:p>
-        </p:txBody>
-      </p:sp>
-      <p:pic>
-        <p:nvPicPr>
-          <p:cNvPr id="8" name="Image 1" descr="preencoded.png">    </p:cNvPr>
+          <p:cNvPr id="6" name="Image 0" descr="preencoded.png"/>
           <p:cNvPicPr>
             <a:picLocks noChangeAspect="1"/>
           </p:cNvPicPr>
@@ -1473,41 +1175,65 @@
         </p:blipFill>
         <p:spPr>
           <a:xfrm>
-            <a:off x="6675120" y="1097280"/>
-            <a:ext cx="640080" cy="640080"/>
+            <a:off x="640080" y="3657600"/>
+            <a:ext cx="274320" cy="274320"/>
           </a:xfrm>
           <a:prstGeom prst="rect">
             <a:avLst/>
           </a:prstGeom>
         </p:spPr>
       </p:pic>
+      <p:sp>
+        <p:nvSpPr>
+          <p:cNvPr id="7" name="Text 4">
+            <a:hlinkClick r:id="rId4"/>
+          </p:cNvPr>
+          <p:cNvSpPr/>
+          <p:nvPr/>
+        </p:nvSpPr>
+        <p:spPr>
+          <a:xfrm>
+            <a:off x="1005840" y="3657600"/>
+            <a:ext cx="4572000" cy="274320"/>
+          </a:xfrm>
+          <a:prstGeom prst="rect">
+            <a:avLst/>
+          </a:prstGeom>
+          <a:noFill/>
+          <a:ln/>
+        </p:spPr>
+        <p:txBody>
+          <a:bodyPr wrap="square" lIns="0" tIns="0" rIns="0" bIns="0" rtlCol="0" anchor="ctr"/>
+          <a:lstStyle/>
+          <a:p>
+            <a:pPr marL="0" indent="0">
+              <a:buNone/>
+            </a:pPr>
+            <a:r>
+              <a:rPr lang="en-US" sz="1200" u="sng" dirty="0">
+                <a:solidFill>
+                  <a:srgbClr val="06B6D4"/>
+                </a:solidFill>
+                <a:latin typeface="Calibri" pitchFamily="34" charset="0"/>
+                <a:ea typeface="Calibri" pitchFamily="34" charset="-122"/>
+                <a:cs typeface="Calibri" pitchFamily="34" charset="-120"/>
+                <a:hlinkClick r:id="rId4">
+                  <a:extLst>
+                    <a:ext uri="{A12FA001-AC4F-418D-AE19-62706E023703}">
+                      <ahyp:hlinkClr xmlns:ahyp="http://schemas.microsoft.com/office/drawing/2018/hyperlinkcolor" val="tx"/>
+                    </a:ext>
+                  </a:extLst>
+                </a:hlinkClick>
+              </a:rPr>
+              <a:t>github.com/erickxllx/Erick-Banegas-AI-Portfolio</a:t>
+            </a:r>
+            <a:endParaRPr lang="en-US" sz="1200" dirty="0"/>
+          </a:p>
+        </p:txBody>
+      </p:sp>
       <p:pic>
         <p:nvPicPr>
-          <p:cNvPr id="9" name="Image 2" descr="preencoded.png">    </p:cNvPr>
-          <p:cNvPicPr>
-            <a:picLocks noChangeAspect="1"/>
-          </p:cNvPicPr>
-          <p:nvPr/>
-        </p:nvPicPr>
-        <p:blipFill>
-          <a:blip r:embed="rId4"/>
-          <a:stretch>
-            <a:fillRect/>
-          </a:stretch>
-        </p:blipFill>
-        <p:spPr>
-          <a:xfrm>
-            <a:off x="7680960" y="1097280"/>
-            <a:ext cx="640080" cy="640080"/>
-          </a:xfrm>
-          <a:prstGeom prst="rect">
-            <a:avLst/>
-          </a:prstGeom>
-        </p:spPr>
-      </p:pic>
-      <p:pic>
-        <p:nvPicPr>
-          <p:cNvPr id="10" name="Image 3" descr="preencoded.png">    </p:cNvPr>
+          <p:cNvPr id="8" name="Image 1" descr="preencoded.png"/>
           <p:cNvPicPr>
             <a:picLocks noChangeAspect="1"/>
           </p:cNvPicPr>
@@ -1521,7 +1247,7 @@
         </p:blipFill>
         <p:spPr>
           <a:xfrm>
-            <a:off x="6675120" y="2286000"/>
+            <a:off x="6675120" y="1097280"/>
             <a:ext cx="640080" cy="640080"/>
           </a:xfrm>
           <a:prstGeom prst="rect">
@@ -1531,7 +1257,7 @@
       </p:pic>
       <p:pic>
         <p:nvPicPr>
-          <p:cNvPr id="11" name="Image 4" descr="preencoded.png">    </p:cNvPr>
+          <p:cNvPr id="9" name="Image 2" descr="preencoded.png"/>
           <p:cNvPicPr>
             <a:picLocks noChangeAspect="1"/>
           </p:cNvPicPr>
@@ -1545,6 +1271,54 @@
         </p:blipFill>
         <p:spPr>
           <a:xfrm>
+            <a:off x="7680960" y="1097280"/>
+            <a:ext cx="640080" cy="640080"/>
+          </a:xfrm>
+          <a:prstGeom prst="rect">
+            <a:avLst/>
+          </a:prstGeom>
+        </p:spPr>
+      </p:pic>
+      <p:pic>
+        <p:nvPicPr>
+          <p:cNvPr id="10" name="Image 3" descr="preencoded.png"/>
+          <p:cNvPicPr>
+            <a:picLocks noChangeAspect="1"/>
+          </p:cNvPicPr>
+          <p:nvPr/>
+        </p:nvPicPr>
+        <p:blipFill>
+          <a:blip r:embed="rId7"/>
+          <a:stretch>
+            <a:fillRect/>
+          </a:stretch>
+        </p:blipFill>
+        <p:spPr>
+          <a:xfrm>
+            <a:off x="6675120" y="2286000"/>
+            <a:ext cx="640080" cy="640080"/>
+          </a:xfrm>
+          <a:prstGeom prst="rect">
+            <a:avLst/>
+          </a:prstGeom>
+        </p:spPr>
+      </p:pic>
+      <p:pic>
+        <p:nvPicPr>
+          <p:cNvPr id="11" name="Image 4" descr="preencoded.png"/>
+          <p:cNvPicPr>
+            <a:picLocks noChangeAspect="1"/>
+          </p:cNvPicPr>
+          <p:nvPr/>
+        </p:nvPicPr>
+        <p:blipFill>
+          <a:blip r:embed="rId8"/>
+          <a:stretch>
+            <a:fillRect/>
+          </a:stretch>
+        </p:blipFill>
+        <p:spPr>
+          <a:xfrm>
             <a:off x="7680960" y="2286000"/>
             <a:ext cx="640080" cy="640080"/>
           </a:xfrm>
@@ -1574,7 +1348,7 @@
           <a:bodyPr wrap="square" lIns="0" tIns="0" rIns="0" bIns="0" rtlCol="0" anchor="ctr"/>
           <a:lstStyle/>
           <a:p>
-            <a:pPr algn="ctr" indent="0" marL="0">
+            <a:pPr marL="0" indent="0" algn="ctr">
               <a:buNone/>
             </a:pPr>
             <a:r>
@@ -1608,6 +1382,7 @@
         <a:solidFill>
           <a:srgbClr val="FFFFFF"/>
         </a:solidFill>
+        <a:effectLst/>
       </p:bgPr>
     </p:bg>
     <p:spTree>
@@ -1645,7 +1420,7 @@
           <a:bodyPr wrap="square" lIns="0" tIns="0" rIns="0" bIns="0" rtlCol="0" anchor="ctr"/>
           <a:lstStyle/>
           <a:p>
-            <a:pPr indent="0" marL="0">
+            <a:pPr marL="0" indent="0">
               <a:buNone/>
             </a:pPr>
             <a:r>
@@ -1684,7 +1459,7 @@
           <a:bodyPr wrap="square" lIns="0" tIns="0" rIns="0" bIns="0" rtlCol="0" anchor="ctr"/>
           <a:lstStyle/>
           <a:p>
-            <a:pPr indent="0" marL="0">
+            <a:pPr marL="0" indent="0">
               <a:buNone/>
             </a:pPr>
             <a:r>
@@ -1724,6 +1499,13 @@
             <a:prstDash val="solid"/>
           </a:ln>
         </p:spPr>
+        <p:txBody>
+          <a:bodyPr/>
+          <a:lstStyle/>
+          <a:p>
+            <a:endParaRPr lang="en-US"/>
+          </a:p>
+        </p:txBody>
       </p:sp>
       <p:sp>
         <p:nvSpPr>
@@ -1744,6 +1526,13 @@
           </a:solidFill>
           <a:ln/>
         </p:spPr>
+        <p:txBody>
+          <a:bodyPr/>
+          <a:lstStyle/>
+          <a:p>
+            <a:endParaRPr lang="en-US"/>
+          </a:p>
+        </p:txBody>
       </p:sp>
       <p:sp>
         <p:nvSpPr>
@@ -1766,7 +1555,7 @@
           <a:bodyPr wrap="square" lIns="0" tIns="0" rIns="0" bIns="0" rtlCol="0" anchor="ctr"/>
           <a:lstStyle/>
           <a:p>
-            <a:pPr algn="ctr" indent="0" marL="0">
+            <a:pPr marL="0" indent="0" algn="ctr">
               <a:buNone/>
             </a:pPr>
             <a:r>
@@ -1783,7 +1572,7 @@
             <a:endParaRPr lang="en-US" sz="1100" dirty="0"/>
           </a:p>
           <a:p>
-            <a:pPr algn="ctr" indent="0" marL="0">
+            <a:pPr marL="0" indent="0" algn="ctr">
               <a:buNone/>
             </a:pPr>
             <a:r>
@@ -1822,7 +1611,7 @@
           <a:bodyPr wrap="square" lIns="0" tIns="0" rIns="0" bIns="0" rtlCol="0" anchor="ctr"/>
           <a:lstStyle/>
           <a:p>
-            <a:pPr algn="ctr" indent="0" marL="0">
+            <a:pPr marL="0" indent="0" algn="ctr">
               <a:buNone/>
             </a:pPr>
             <a:r>
@@ -1859,6 +1648,13 @@
           </a:solidFill>
           <a:ln/>
         </p:spPr>
+        <p:txBody>
+          <a:bodyPr/>
+          <a:lstStyle/>
+          <a:p>
+            <a:endParaRPr lang="en-US"/>
+          </a:p>
+        </p:txBody>
       </p:sp>
       <p:sp>
         <p:nvSpPr>
@@ -1881,7 +1677,7 @@
           <a:bodyPr wrap="square" lIns="0" tIns="0" rIns="0" bIns="0" rtlCol="0" anchor="ctr"/>
           <a:lstStyle/>
           <a:p>
-            <a:pPr algn="ctr" indent="0" marL="0">
+            <a:pPr marL="0" indent="0" algn="ctr">
               <a:buNone/>
             </a:pPr>
             <a:r>
@@ -1920,7 +1716,7 @@
           <a:bodyPr wrap="square" lIns="0" tIns="0" rIns="0" bIns="0" rtlCol="0" anchor="ctr"/>
           <a:lstStyle/>
           <a:p>
-            <a:pPr algn="ctr" indent="0" marL="0">
+            <a:pPr marL="0" indent="0" algn="ctr">
               <a:buNone/>
             </a:pPr>
             <a:r>
@@ -1957,6 +1753,13 @@
           </a:solidFill>
           <a:ln/>
         </p:spPr>
+        <p:txBody>
+          <a:bodyPr/>
+          <a:lstStyle/>
+          <a:p>
+            <a:endParaRPr lang="en-US"/>
+          </a:p>
+        </p:txBody>
       </p:sp>
       <p:sp>
         <p:nvSpPr>
@@ -1979,7 +1782,7 @@
           <a:bodyPr wrap="square" lIns="0" tIns="0" rIns="0" bIns="0" rtlCol="0" anchor="ctr"/>
           <a:lstStyle/>
           <a:p>
-            <a:pPr algn="ctr" indent="0" marL="0">
+            <a:pPr marL="0" indent="0" algn="ctr">
               <a:buNone/>
             </a:pPr>
             <a:r>
@@ -1996,7 +1799,7 @@
             <a:endParaRPr lang="en-US" sz="1100" dirty="0"/>
           </a:p>
           <a:p>
-            <a:pPr algn="ctr" indent="0" marL="0">
+            <a:pPr marL="0" indent="0" algn="ctr">
               <a:buNone/>
             </a:pPr>
             <a:r>
@@ -2035,7 +1838,7 @@
           <a:bodyPr wrap="square" lIns="0" tIns="0" rIns="0" bIns="0" rtlCol="0" anchor="ctr"/>
           <a:lstStyle/>
           <a:p>
-            <a:pPr algn="ctr" indent="0" marL="0">
+            <a:pPr marL="0" indent="0" algn="ctr">
               <a:buNone/>
             </a:pPr>
             <a:r>
@@ -2072,6 +1875,13 @@
           </a:solidFill>
           <a:ln/>
         </p:spPr>
+        <p:txBody>
+          <a:bodyPr/>
+          <a:lstStyle/>
+          <a:p>
+            <a:endParaRPr lang="en-US"/>
+          </a:p>
+        </p:txBody>
       </p:sp>
       <p:sp>
         <p:nvSpPr>
@@ -2094,7 +1904,7 @@
           <a:bodyPr wrap="square" lIns="0" tIns="0" rIns="0" bIns="0" rtlCol="0" anchor="ctr"/>
           <a:lstStyle/>
           <a:p>
-            <a:pPr algn="ctr" indent="0" marL="0">
+            <a:pPr marL="0" indent="0" algn="ctr">
               <a:buNone/>
             </a:pPr>
             <a:r>
@@ -2111,7 +1921,7 @@
             <a:endParaRPr lang="en-US" sz="1100" dirty="0"/>
           </a:p>
           <a:p>
-            <a:pPr algn="ctr" indent="0" marL="0">
+            <a:pPr marL="0" indent="0" algn="ctr">
               <a:buNone/>
             </a:pPr>
             <a:r>
@@ -2150,7 +1960,7 @@
           <a:bodyPr wrap="square" lIns="0" tIns="0" rIns="0" bIns="0" rtlCol="0" anchor="ctr"/>
           <a:lstStyle/>
           <a:p>
-            <a:pPr algn="ctr" indent="0" marL="0">
+            <a:pPr marL="0" indent="0" algn="ctr">
               <a:buNone/>
             </a:pPr>
             <a:r>
@@ -2187,6 +1997,13 @@
           </a:solidFill>
           <a:ln/>
         </p:spPr>
+        <p:txBody>
+          <a:bodyPr/>
+          <a:lstStyle/>
+          <a:p>
+            <a:endParaRPr lang="en-US"/>
+          </a:p>
+        </p:txBody>
       </p:sp>
       <p:sp>
         <p:nvSpPr>
@@ -2209,7 +2026,7 @@
           <a:bodyPr wrap="square" lIns="0" tIns="0" rIns="0" bIns="0" rtlCol="0" anchor="ctr"/>
           <a:lstStyle/>
           <a:p>
-            <a:pPr algn="ctr" indent="0" marL="0">
+            <a:pPr marL="0" indent="0" algn="ctr">
               <a:buNone/>
             </a:pPr>
             <a:r>
@@ -2226,7 +2043,7 @@
             <a:endParaRPr lang="en-US" sz="1100" dirty="0"/>
           </a:p>
           <a:p>
-            <a:pPr algn="ctr" indent="0" marL="0">
+            <a:pPr marL="0" indent="0" algn="ctr">
               <a:buNone/>
             </a:pPr>
             <a:r>
@@ -2265,7 +2082,7 @@
           <a:bodyPr wrap="square" lIns="0" tIns="0" rIns="0" bIns="0" rtlCol="0" anchor="ctr"/>
           <a:lstStyle/>
           <a:p>
-            <a:pPr algn="ctr" indent="0" marL="0">
+            <a:pPr marL="0" indent="0" algn="ctr">
               <a:buNone/>
             </a:pPr>
             <a:r>
@@ -2304,7 +2121,7 @@
           <a:bodyPr wrap="square" lIns="0" tIns="0" rIns="0" bIns="0" rtlCol="0" anchor="ctr"/>
           <a:lstStyle/>
           <a:p>
-            <a:pPr indent="0" marL="0">
+            <a:pPr marL="0" indent="0">
               <a:buNone/>
             </a:pPr>
             <a:r>
@@ -2348,6 +2165,13 @@
             <a:prstDash val="solid"/>
           </a:ln>
         </p:spPr>
+        <p:txBody>
+          <a:bodyPr/>
+          <a:lstStyle/>
+          <a:p>
+            <a:endParaRPr lang="en-US"/>
+          </a:p>
+        </p:txBody>
       </p:sp>
       <p:sp>
         <p:nvSpPr>
@@ -2370,7 +2194,7 @@
           <a:bodyPr wrap="square" lIns="0" tIns="0" rIns="0" bIns="0" rtlCol="0" anchor="ctr"/>
           <a:lstStyle/>
           <a:p>
-            <a:pPr algn="ctr" indent="0" marL="0">
+            <a:pPr marL="0" indent="0" algn="ctr">
               <a:buNone/>
             </a:pPr>
             <a:r>
@@ -2414,6 +2238,13 @@
             <a:prstDash val="solid"/>
           </a:ln>
         </p:spPr>
+        <p:txBody>
+          <a:bodyPr/>
+          <a:lstStyle/>
+          <a:p>
+            <a:endParaRPr lang="en-US"/>
+          </a:p>
+        </p:txBody>
       </p:sp>
       <p:sp>
         <p:nvSpPr>
@@ -2436,7 +2267,7 @@
           <a:bodyPr wrap="square" lIns="0" tIns="0" rIns="0" bIns="0" rtlCol="0" anchor="ctr"/>
           <a:lstStyle/>
           <a:p>
-            <a:pPr algn="ctr" indent="0" marL="0">
+            <a:pPr marL="0" indent="0" algn="ctr">
               <a:buNone/>
             </a:pPr>
             <a:r>
@@ -2480,6 +2311,13 @@
             <a:prstDash val="solid"/>
           </a:ln>
         </p:spPr>
+        <p:txBody>
+          <a:bodyPr/>
+          <a:lstStyle/>
+          <a:p>
+            <a:endParaRPr lang="en-US"/>
+          </a:p>
+        </p:txBody>
       </p:sp>
       <p:sp>
         <p:nvSpPr>
@@ -2502,7 +2340,7 @@
           <a:bodyPr wrap="square" lIns="0" tIns="0" rIns="0" bIns="0" rtlCol="0" anchor="ctr"/>
           <a:lstStyle/>
           <a:p>
-            <a:pPr algn="ctr" indent="0" marL="0">
+            <a:pPr marL="0" indent="0" algn="ctr">
               <a:buNone/>
             </a:pPr>
             <a:r>
@@ -2546,6 +2384,13 @@
             <a:prstDash val="solid"/>
           </a:ln>
         </p:spPr>
+        <p:txBody>
+          <a:bodyPr/>
+          <a:lstStyle/>
+          <a:p>
+            <a:endParaRPr lang="en-US"/>
+          </a:p>
+        </p:txBody>
       </p:sp>
       <p:sp>
         <p:nvSpPr>
@@ -2568,7 +2413,7 @@
           <a:bodyPr wrap="square" lIns="0" tIns="0" rIns="0" bIns="0" rtlCol="0" anchor="ctr"/>
           <a:lstStyle/>
           <a:p>
-            <a:pPr algn="ctr" indent="0" marL="0">
+            <a:pPr marL="0" indent="0" algn="ctr">
               <a:buNone/>
             </a:pPr>
             <a:r>
@@ -2612,6 +2457,13 @@
             <a:prstDash val="solid"/>
           </a:ln>
         </p:spPr>
+        <p:txBody>
+          <a:bodyPr/>
+          <a:lstStyle/>
+          <a:p>
+            <a:endParaRPr lang="en-US"/>
+          </a:p>
+        </p:txBody>
       </p:sp>
       <p:sp>
         <p:nvSpPr>
@@ -2634,7 +2486,7 @@
           <a:bodyPr wrap="square" lIns="0" tIns="0" rIns="0" bIns="0" rtlCol="0" anchor="ctr"/>
           <a:lstStyle/>
           <a:p>
-            <a:pPr algn="ctr" indent="0" marL="0">
+            <a:pPr marL="0" indent="0" algn="ctr">
               <a:buNone/>
             </a:pPr>
             <a:r>
@@ -2678,6 +2530,13 @@
             <a:prstDash val="solid"/>
           </a:ln>
         </p:spPr>
+        <p:txBody>
+          <a:bodyPr/>
+          <a:lstStyle/>
+          <a:p>
+            <a:endParaRPr lang="en-US"/>
+          </a:p>
+        </p:txBody>
       </p:sp>
       <p:sp>
         <p:nvSpPr>
@@ -2700,7 +2559,7 @@
           <a:bodyPr wrap="square" lIns="0" tIns="0" rIns="0" bIns="0" rtlCol="0" anchor="ctr"/>
           <a:lstStyle/>
           <a:p>
-            <a:pPr algn="ctr" indent="0" marL="0">
+            <a:pPr marL="0" indent="0" algn="ctr">
               <a:buNone/>
             </a:pPr>
             <a:r>
@@ -2721,7 +2580,7 @@
       <p:sp>
         <p:nvSpPr>
           <p:cNvPr id="33" name="Text 31">
-            <a:hlinkClick r:id="rId1" tooltip=""/>
+            <a:hlinkClick r:id="rId3"/>
           </p:cNvPr>
           <p:cNvSpPr/>
           <p:nvPr/>
@@ -2741,7 +2600,7 @@
           <a:bodyPr wrap="square" lIns="0" tIns="0" rIns="0" bIns="0" rtlCol="0" anchor="ctr"/>
           <a:lstStyle/>
           <a:p>
-            <a:pPr indent="0" marL="0">
+            <a:pPr marL="0" indent="0">
               <a:buNone/>
             </a:pPr>
             <a:r>
@@ -2752,7 +2611,7 @@
                 <a:latin typeface="Calibri" pitchFamily="34" charset="0"/>
                 <a:ea typeface="Calibri" pitchFamily="34" charset="-122"/>
                 <a:cs typeface="Calibri" pitchFamily="34" charset="-120"/>
-                <a:hlinkClick r:id="rId1" invalidUrl="" action="" tgtFrame="" tooltip="" history="1" highlightClick="0" endSnd="0">
+                <a:hlinkClick r:id="rId3">
                   <a:extLst>
                     <a:ext uri="{A12FA001-AC4F-418D-AE19-62706E023703}">
                       <ahyp:hlinkClr xmlns:ahyp="http://schemas.microsoft.com/office/drawing/2018/hyperlinkcolor" val="tx"/>
@@ -2782,6 +2641,7 @@
         <a:solidFill>
           <a:srgbClr val="FFFFFF"/>
         </a:solidFill>
+        <a:effectLst/>
       </p:bgPr>
     </p:bg>
     <p:spTree>
@@ -2819,7 +2679,7 @@
           <a:bodyPr wrap="square" lIns="0" tIns="0" rIns="0" bIns="0" rtlCol="0" anchor="ctr"/>
           <a:lstStyle/>
           <a:p>
-            <a:pPr indent="0" marL="0">
+            <a:pPr marL="0" indent="0">
               <a:buNone/>
             </a:pPr>
             <a:r>
@@ -2856,13 +2716,20 @@
           </a:solidFill>
           <a:ln/>
           <a:effectLst>
-            <a:outerShdw sx="100000" sy="100000" kx="0" ky="0" algn="bl" rotWithShape="0" blurRad="101600" dist="38100" dir="8100000">
+            <a:outerShdw blurRad="101600" dist="38100" dir="8100000" algn="bl" rotWithShape="0">
               <a:srgbClr val="000000">
                 <a:alpha val="20000"/>
               </a:srgbClr>
             </a:outerShdw>
           </a:effectLst>
         </p:spPr>
+        <p:txBody>
+          <a:bodyPr/>
+          <a:lstStyle/>
+          <a:p>
+            <a:endParaRPr lang="en-US"/>
+          </a:p>
+        </p:txBody>
       </p:sp>
       <p:sp>
         <p:nvSpPr>
@@ -2883,386 +2750,17 @@
           </a:solidFill>
           <a:ln/>
         </p:spPr>
+        <p:txBody>
+          <a:bodyPr/>
+          <a:lstStyle/>
+          <a:p>
+            <a:endParaRPr lang="en-US"/>
+          </a:p>
+        </p:txBody>
       </p:sp>
       <p:pic>
         <p:nvPicPr>
-          <p:cNvPr id="5" name="Image 0" descr="preencoded.png">    </p:cNvPr>
-          <p:cNvPicPr>
-            <a:picLocks noChangeAspect="1"/>
-          </p:cNvPicPr>
-          <p:nvPr/>
-        </p:nvPicPr>
-        <p:blipFill>
-          <a:blip r:embed="rId1"/>
-          <a:stretch>
-            <a:fillRect/>
-          </a:stretch>
-        </p:blipFill>
-        <p:spPr>
-          <a:xfrm>
-            <a:off x="685800" y="1234440"/>
-            <a:ext cx="320040" cy="320040"/>
-          </a:xfrm>
-          <a:prstGeom prst="rect">
-            <a:avLst/>
-          </a:prstGeom>
-        </p:spPr>
-      </p:pic>
-      <p:sp>
-        <p:nvSpPr>
-          <p:cNvPr id="6" name="Text 3"/>
-          <p:cNvSpPr/>
-          <p:nvPr/>
-        </p:nvSpPr>
-        <p:spPr>
-          <a:xfrm>
-            <a:off x="1097280" y="1207008"/>
-            <a:ext cx="3108960" cy="320040"/>
-          </a:xfrm>
-          <a:prstGeom prst="rect">
-            <a:avLst/>
-          </a:prstGeom>
-          <a:noFill/>
-          <a:ln/>
-        </p:spPr>
-        <p:txBody>
-          <a:bodyPr wrap="square" lIns="0" tIns="0" rIns="0" bIns="0" rtlCol="0" anchor="ctr"/>
-          <a:lstStyle/>
-          <a:p>
-            <a:pPr indent="0" marL="0">
-              <a:buNone/>
-            </a:pPr>
-            <a:r>
-              <a:rPr lang="en-US" sz="1400" b="1" dirty="0">
-                <a:solidFill>
-                  <a:srgbClr val="0A1628"/>
-                </a:solidFill>
-                <a:latin typeface="Trebuchet MS" pitchFamily="34" charset="0"/>
-                <a:ea typeface="Trebuchet MS" pitchFamily="34" charset="-122"/>
-                <a:cs typeface="Trebuchet MS" pitchFamily="34" charset="-120"/>
-              </a:rPr>
-              <a:t>Diffusion Model</a:t>
-            </a:r>
-            <a:endParaRPr lang="en-US" sz="1400" dirty="0"/>
-          </a:p>
-        </p:txBody>
-      </p:sp>
-      <p:sp>
-        <p:nvSpPr>
-          <p:cNvPr id="7" name="Text 4"/>
-          <p:cNvSpPr/>
-          <p:nvPr/>
-        </p:nvSpPr>
-        <p:spPr>
-          <a:xfrm>
-            <a:off x="685800" y="1600200"/>
-            <a:ext cx="3474720" cy="685800"/>
-          </a:xfrm>
-          <a:prstGeom prst="rect">
-            <a:avLst/>
-          </a:prstGeom>
-          <a:noFill/>
-          <a:ln/>
-        </p:spPr>
-        <p:txBody>
-          <a:bodyPr wrap="square" lIns="0" tIns="0" rIns="0" bIns="0" rtlCol="0" anchor="ctr"/>
-          <a:lstStyle/>
-          <a:p>
-            <a:pPr indent="0" marL="0">
-              <a:buNone/>
-            </a:pPr>
-            <a:r>
-              <a:rPr lang="en-US" sz="1000" dirty="0">
-                <a:solidFill>
-                  <a:srgbClr val="334155"/>
-                </a:solidFill>
-                <a:latin typeface="Calibri" pitchFamily="34" charset="0"/>
-                <a:ea typeface="Calibri" pitchFamily="34" charset="-122"/>
-                <a:cs typeface="Calibri" pitchFamily="34" charset="-120"/>
-              </a:rPr>
-              <a:t>Built a U-Net generative model from scratch. Implemented forward/reverse diffusion, noise scheduling, and CLIP-based evaluation to generate images from pure noise.</a:t>
-            </a:r>
-            <a:endParaRPr lang="en-US" sz="1000" dirty="0"/>
-          </a:p>
-        </p:txBody>
-      </p:sp>
-      <p:sp>
-        <p:nvSpPr>
-          <p:cNvPr id="8" name="Text 5"/>
-          <p:cNvSpPr/>
-          <p:nvPr/>
-        </p:nvSpPr>
-        <p:spPr>
-          <a:xfrm>
-            <a:off x="685800" y="2286000"/>
-            <a:ext cx="3474720" cy="274320"/>
-          </a:xfrm>
-          <a:prstGeom prst="rect">
-            <a:avLst/>
-          </a:prstGeom>
-          <a:noFill/>
-          <a:ln/>
-        </p:spPr>
-        <p:txBody>
-          <a:bodyPr wrap="square" lIns="0" tIns="0" rIns="0" bIns="0" rtlCol="0" anchor="ctr"/>
-          <a:lstStyle/>
-          <a:p>
-            <a:pPr indent="0" marL="0">
-              <a:buNone/>
-            </a:pPr>
-            <a:r>
-              <a:rPr lang="en-US" sz="900" b="1" dirty="0">
-                <a:solidFill>
-                  <a:srgbClr val="0891B2"/>
-                </a:solidFill>
-                <a:latin typeface="Calibri" pitchFamily="34" charset="0"/>
-                <a:ea typeface="Calibri" pitchFamily="34" charset="-122"/>
-                <a:cs typeface="Calibri" pitchFamily="34" charset="-120"/>
-              </a:rPr>
-              <a:t>PyTorch · U-Net · CLIP</a:t>
-            </a:r>
-            <a:endParaRPr lang="en-US" sz="900" dirty="0"/>
-          </a:p>
-        </p:txBody>
-      </p:sp>
-      <p:sp>
-        <p:nvSpPr>
-          <p:cNvPr id="9" name="Shape 6"/>
-          <p:cNvSpPr/>
-          <p:nvPr/>
-        </p:nvSpPr>
-        <p:spPr>
-          <a:xfrm>
-            <a:off x="4754880" y="1097280"/>
-            <a:ext cx="3931920" cy="1554480"/>
-          </a:xfrm>
-          <a:prstGeom prst="rect">
-            <a:avLst/>
-          </a:prstGeom>
-          <a:solidFill>
-            <a:srgbClr val="F8FAFC"/>
-          </a:solidFill>
-          <a:ln/>
-          <a:effectLst>
-            <a:outerShdw sx="100000" sy="100000" kx="0" ky="0" algn="bl" rotWithShape="0" blurRad="101600" dist="38100" dir="8100000">
-              <a:srgbClr val="000000">
-                <a:alpha val="20000"/>
-              </a:srgbClr>
-            </a:outerShdw>
-          </a:effectLst>
-        </p:spPr>
-      </p:sp>
-      <p:sp>
-        <p:nvSpPr>
-          <p:cNvPr id="10" name="Shape 7"/>
-          <p:cNvSpPr/>
-          <p:nvPr/>
-        </p:nvSpPr>
-        <p:spPr>
-          <a:xfrm>
-            <a:off x="4754880" y="1097280"/>
-            <a:ext cx="54864" cy="1554480"/>
-          </a:xfrm>
-          <a:prstGeom prst="rect">
-            <a:avLst/>
-          </a:prstGeom>
-          <a:solidFill>
-            <a:srgbClr val="0891B2"/>
-          </a:solidFill>
-          <a:ln/>
-        </p:spPr>
-      </p:sp>
-      <p:pic>
-        <p:nvPicPr>
-          <p:cNvPr id="11" name="Image 1" descr="preencoded.png">    </p:cNvPr>
-          <p:cNvPicPr>
-            <a:picLocks noChangeAspect="1"/>
-          </p:cNvPicPr>
-          <p:nvPr/>
-        </p:nvPicPr>
-        <p:blipFill>
-          <a:blip r:embed="rId2"/>
-          <a:stretch>
-            <a:fillRect/>
-          </a:stretch>
-        </p:blipFill>
-        <p:spPr>
-          <a:xfrm>
-            <a:off x="4983480" y="1234440"/>
-            <a:ext cx="320040" cy="320040"/>
-          </a:xfrm>
-          <a:prstGeom prst="rect">
-            <a:avLst/>
-          </a:prstGeom>
-        </p:spPr>
-      </p:pic>
-      <p:sp>
-        <p:nvSpPr>
-          <p:cNvPr id="12" name="Text 8"/>
-          <p:cNvSpPr/>
-          <p:nvPr/>
-        </p:nvSpPr>
-        <p:spPr>
-          <a:xfrm>
-            <a:off x="5394960" y="1207008"/>
-            <a:ext cx="3108960" cy="320040"/>
-          </a:xfrm>
-          <a:prstGeom prst="rect">
-            <a:avLst/>
-          </a:prstGeom>
-          <a:noFill/>
-          <a:ln/>
-        </p:spPr>
-        <p:txBody>
-          <a:bodyPr wrap="square" lIns="0" tIns="0" rIns="0" bIns="0" rtlCol="0" anchor="ctr"/>
-          <a:lstStyle/>
-          <a:p>
-            <a:pPr indent="0" marL="0">
-              <a:buNone/>
-            </a:pPr>
-            <a:r>
-              <a:rPr lang="en-US" sz="1400" b="1" dirty="0">
-                <a:solidFill>
-                  <a:srgbClr val="0A1628"/>
-                </a:solidFill>
-                <a:latin typeface="Trebuchet MS" pitchFamily="34" charset="0"/>
-                <a:ea typeface="Trebuchet MS" pitchFamily="34" charset="-122"/>
-                <a:cs typeface="Trebuchet MS" pitchFamily="34" charset="-120"/>
-              </a:rPr>
-              <a:t>RNN vs Transformer vs ViT</a:t>
-            </a:r>
-            <a:endParaRPr lang="en-US" sz="1400" dirty="0"/>
-          </a:p>
-        </p:txBody>
-      </p:sp>
-      <p:sp>
-        <p:nvSpPr>
-          <p:cNvPr id="13" name="Text 9"/>
-          <p:cNvSpPr/>
-          <p:nvPr/>
-        </p:nvSpPr>
-        <p:spPr>
-          <a:xfrm>
-            <a:off x="4983480" y="1600200"/>
-            <a:ext cx="3474720" cy="685800"/>
-          </a:xfrm>
-          <a:prstGeom prst="rect">
-            <a:avLst/>
-          </a:prstGeom>
-          <a:noFill/>
-          <a:ln/>
-        </p:spPr>
-        <p:txBody>
-          <a:bodyPr wrap="square" lIns="0" tIns="0" rIns="0" bIns="0" rtlCol="0" anchor="ctr"/>
-          <a:lstStyle/>
-          <a:p>
-            <a:pPr indent="0" marL="0">
-              <a:buNone/>
-            </a:pPr>
-            <a:r>
-              <a:rPr lang="en-US" sz="1000" dirty="0">
-                <a:solidFill>
-                  <a:srgbClr val="334155"/>
-                </a:solidFill>
-                <a:latin typeface="Calibri" pitchFamily="34" charset="0"/>
-                <a:ea typeface="Calibri" pitchFamily="34" charset="-122"/>
-                <a:cs typeface="Calibri" pitchFamily="34" charset="-120"/>
-              </a:rPr>
-              <a:t>Compared three major architectures — LSTM/GRU, Transformers, and Vision Transformers — on text and image classification tasks.</a:t>
-            </a:r>
-            <a:endParaRPr lang="en-US" sz="1000" dirty="0"/>
-          </a:p>
-        </p:txBody>
-      </p:sp>
-      <p:sp>
-        <p:nvSpPr>
-          <p:cNvPr id="14" name="Text 10"/>
-          <p:cNvSpPr/>
-          <p:nvPr/>
-        </p:nvSpPr>
-        <p:spPr>
-          <a:xfrm>
-            <a:off x="4983480" y="2286000"/>
-            <a:ext cx="3474720" cy="274320"/>
-          </a:xfrm>
-          <a:prstGeom prst="rect">
-            <a:avLst/>
-          </a:prstGeom>
-          <a:noFill/>
-          <a:ln/>
-        </p:spPr>
-        <p:txBody>
-          <a:bodyPr wrap="square" lIns="0" tIns="0" rIns="0" bIns="0" rtlCol="0" anchor="ctr"/>
-          <a:lstStyle/>
-          <a:p>
-            <a:pPr indent="0" marL="0">
-              <a:buNone/>
-            </a:pPr>
-            <a:r>
-              <a:rPr lang="en-US" sz="900" b="1" dirty="0">
-                <a:solidFill>
-                  <a:srgbClr val="0891B2"/>
-                </a:solidFill>
-                <a:latin typeface="Calibri" pitchFamily="34" charset="0"/>
-                <a:ea typeface="Calibri" pitchFamily="34" charset="-122"/>
-                <a:cs typeface="Calibri" pitchFamily="34" charset="-120"/>
-              </a:rPr>
-              <a:t>PyTorch · Attention · ViT</a:t>
-            </a:r>
-            <a:endParaRPr lang="en-US" sz="900" dirty="0"/>
-          </a:p>
-        </p:txBody>
-      </p:sp>
-      <p:sp>
-        <p:nvSpPr>
-          <p:cNvPr id="15" name="Shape 11"/>
-          <p:cNvSpPr/>
-          <p:nvPr/>
-        </p:nvSpPr>
-        <p:spPr>
-          <a:xfrm>
-            <a:off x="457200" y="2926080"/>
-            <a:ext cx="3931920" cy="1554480"/>
-          </a:xfrm>
-          <a:prstGeom prst="rect">
-            <a:avLst/>
-          </a:prstGeom>
-          <a:solidFill>
-            <a:srgbClr val="F8FAFC"/>
-          </a:solidFill>
-          <a:ln/>
-          <a:effectLst>
-            <a:outerShdw sx="100000" sy="100000" kx="0" ky="0" algn="bl" rotWithShape="0" blurRad="101600" dist="38100" dir="8100000">
-              <a:srgbClr val="000000">
-                <a:alpha val="20000"/>
-              </a:srgbClr>
-            </a:outerShdw>
-          </a:effectLst>
-        </p:spPr>
-      </p:sp>
-      <p:sp>
-        <p:nvSpPr>
-          <p:cNvPr id="16" name="Shape 12"/>
-          <p:cNvSpPr/>
-          <p:nvPr/>
-        </p:nvSpPr>
-        <p:spPr>
-          <a:xfrm>
-            <a:off x="457200" y="2926080"/>
-            <a:ext cx="54864" cy="1554480"/>
-          </a:xfrm>
-          <a:prstGeom prst="rect">
-            <a:avLst/>
-          </a:prstGeom>
-          <a:solidFill>
-            <a:srgbClr val="0891B2"/>
-          </a:solidFill>
-          <a:ln/>
-        </p:spPr>
-      </p:sp>
-      <p:pic>
-        <p:nvPicPr>
-          <p:cNvPr id="17" name="Image 2" descr="preencoded.png">    </p:cNvPr>
+          <p:cNvPr id="5" name="Image 0" descr="preencoded.png"/>
           <p:cNvPicPr>
             <a:picLocks noChangeAspect="1"/>
           </p:cNvPicPr>
@@ -3276,7 +2774,7 @@
         </p:blipFill>
         <p:spPr>
           <a:xfrm>
-            <a:off x="685800" y="3063240"/>
+            <a:off x="685800" y="1234440"/>
             <a:ext cx="320040" cy="320040"/>
           </a:xfrm>
           <a:prstGeom prst="rect">
@@ -3286,13 +2784,13 @@
       </p:pic>
       <p:sp>
         <p:nvSpPr>
-          <p:cNvPr id="18" name="Text 13"/>
-          <p:cNvSpPr/>
-          <p:nvPr/>
-        </p:nvSpPr>
-        <p:spPr>
-          <a:xfrm>
-            <a:off x="1097280" y="3035808"/>
+          <p:cNvPr id="6" name="Text 3"/>
+          <p:cNvSpPr/>
+          <p:nvPr/>
+        </p:nvSpPr>
+        <p:spPr>
+          <a:xfrm>
+            <a:off x="1097280" y="1207008"/>
             <a:ext cx="3108960" cy="320040"/>
           </a:xfrm>
           <a:prstGeom prst="rect">
@@ -3305,7 +2803,7 @@
           <a:bodyPr wrap="square" lIns="0" tIns="0" rIns="0" bIns="0" rtlCol="0" anchor="ctr"/>
           <a:lstStyle/>
           <a:p>
-            <a:pPr indent="0" marL="0">
+            <a:pPr marL="0" indent="0">
               <a:buNone/>
             </a:pPr>
             <a:r>
@@ -3317,7 +2815,7 @@
                 <a:ea typeface="Trebuchet MS" pitchFamily="34" charset="-122"/>
                 <a:cs typeface="Trebuchet MS" pitchFamily="34" charset="-120"/>
               </a:rPr>
-              <a:t>CNN Image Classification</a:t>
+              <a:t>Diffusion Model</a:t>
             </a:r>
             <a:endParaRPr lang="en-US" sz="1400" dirty="0"/>
           </a:p>
@@ -3325,13 +2823,13 @@
       </p:sp>
       <p:sp>
         <p:nvSpPr>
-          <p:cNvPr id="19" name="Text 14"/>
-          <p:cNvSpPr/>
-          <p:nvPr/>
-        </p:nvSpPr>
-        <p:spPr>
-          <a:xfrm>
-            <a:off x="685800" y="3429000"/>
+          <p:cNvPr id="7" name="Text 4"/>
+          <p:cNvSpPr/>
+          <p:nvPr/>
+        </p:nvSpPr>
+        <p:spPr>
+          <a:xfrm>
+            <a:off x="685800" y="1600200"/>
             <a:ext cx="3474720" cy="685800"/>
           </a:xfrm>
           <a:prstGeom prst="rect">
@@ -3344,7 +2842,7 @@
           <a:bodyPr wrap="square" lIns="0" tIns="0" rIns="0" bIns="0" rtlCol="0" anchor="ctr"/>
           <a:lstStyle/>
           <a:p>
-            <a:pPr indent="0" marL="0">
+            <a:pPr marL="0" indent="0">
               <a:buNone/>
             </a:pPr>
             <a:r>
@@ -3356,7 +2854,7 @@
                 <a:ea typeface="Calibri" pitchFamily="34" charset="-122"/>
                 <a:cs typeface="Calibri" pitchFamily="34" charset="-120"/>
               </a:rPr>
-              <a:t>Built a CNN for binary classification (Puppy vs Bagel) with data augmentation and transfer learning techniques.</a:t>
+              <a:t>Built a U-Net generative model from scratch. Implemented forward/reverse diffusion, noise scheduling, and CLIP-based evaluation to generate images from pure noise.</a:t>
             </a:r>
             <a:endParaRPr lang="en-US" sz="1000" dirty="0"/>
           </a:p>
@@ -3364,13 +2862,13 @@
       </p:sp>
       <p:sp>
         <p:nvSpPr>
-          <p:cNvPr id="20" name="Text 15"/>
-          <p:cNvSpPr/>
-          <p:nvPr/>
-        </p:nvSpPr>
-        <p:spPr>
-          <a:xfrm>
-            <a:off x="685800" y="4114800"/>
+          <p:cNvPr id="8" name="Text 5"/>
+          <p:cNvSpPr/>
+          <p:nvPr/>
+        </p:nvSpPr>
+        <p:spPr>
+          <a:xfrm>
+            <a:off x="685800" y="2286000"/>
             <a:ext cx="3474720" cy="274320"/>
           </a:xfrm>
           <a:prstGeom prst="rect">
@@ -3383,7 +2881,7 @@
           <a:bodyPr wrap="square" lIns="0" tIns="0" rIns="0" bIns="0" rtlCol="0" anchor="ctr"/>
           <a:lstStyle/>
           <a:p>
-            <a:pPr indent="0" marL="0">
+            <a:pPr marL="0" indent="0">
               <a:buNone/>
             </a:pPr>
             <a:r>
@@ -3395,7 +2893,7 @@
                 <a:ea typeface="Calibri" pitchFamily="34" charset="-122"/>
                 <a:cs typeface="Calibri" pitchFamily="34" charset="-120"/>
               </a:rPr>
-              <a:t>TensorFlow · Keras · CNN</a:t>
+              <a:t>PyTorch · U-Net · CLIP</a:t>
             </a:r>
             <a:endParaRPr lang="en-US" sz="900" dirty="0"/>
           </a:p>
@@ -3403,13 +2901,13 @@
       </p:sp>
       <p:sp>
         <p:nvSpPr>
-          <p:cNvPr id="21" name="Shape 16"/>
-          <p:cNvSpPr/>
-          <p:nvPr/>
-        </p:nvSpPr>
-        <p:spPr>
-          <a:xfrm>
-            <a:off x="4754880" y="2926080"/>
+          <p:cNvPr id="9" name="Shape 6"/>
+          <p:cNvSpPr/>
+          <p:nvPr/>
+        </p:nvSpPr>
+        <p:spPr>
+          <a:xfrm>
+            <a:off x="4754880" y="1097280"/>
             <a:ext cx="3931920" cy="1554480"/>
           </a:xfrm>
           <a:prstGeom prst="rect">
@@ -3420,23 +2918,30 @@
           </a:solidFill>
           <a:ln/>
           <a:effectLst>
-            <a:outerShdw sx="100000" sy="100000" kx="0" ky="0" algn="bl" rotWithShape="0" blurRad="101600" dist="38100" dir="8100000">
+            <a:outerShdw blurRad="101600" dist="38100" dir="8100000" algn="bl" rotWithShape="0">
               <a:srgbClr val="000000">
                 <a:alpha val="20000"/>
               </a:srgbClr>
             </a:outerShdw>
           </a:effectLst>
         </p:spPr>
-      </p:sp>
-      <p:sp>
-        <p:nvSpPr>
-          <p:cNvPr id="22" name="Shape 17"/>
-          <p:cNvSpPr/>
-          <p:nvPr/>
-        </p:nvSpPr>
-        <p:spPr>
-          <a:xfrm>
-            <a:off x="4754880" y="2926080"/>
+        <p:txBody>
+          <a:bodyPr/>
+          <a:lstStyle/>
+          <a:p>
+            <a:endParaRPr lang="en-US"/>
+          </a:p>
+        </p:txBody>
+      </p:sp>
+      <p:sp>
+        <p:nvSpPr>
+          <p:cNvPr id="10" name="Shape 7"/>
+          <p:cNvSpPr/>
+          <p:nvPr/>
+        </p:nvSpPr>
+        <p:spPr>
+          <a:xfrm>
+            <a:off x="4754880" y="1097280"/>
             <a:ext cx="54864" cy="1554480"/>
           </a:xfrm>
           <a:prstGeom prst="rect">
@@ -3447,10 +2952,17 @@
           </a:solidFill>
           <a:ln/>
         </p:spPr>
+        <p:txBody>
+          <a:bodyPr/>
+          <a:lstStyle/>
+          <a:p>
+            <a:endParaRPr lang="en-US"/>
+          </a:p>
+        </p:txBody>
       </p:sp>
       <p:pic>
         <p:nvPicPr>
-          <p:cNvPr id="23" name="Image 3" descr="preencoded.png">    </p:cNvPr>
+          <p:cNvPr id="11" name="Image 1" descr="preencoded.png"/>
           <p:cNvPicPr>
             <a:picLocks noChangeAspect="1"/>
           </p:cNvPicPr>
@@ -3464,7 +2976,7 @@
         </p:blipFill>
         <p:spPr>
           <a:xfrm>
-            <a:off x="4983480" y="3063240"/>
+            <a:off x="4983480" y="1234440"/>
             <a:ext cx="320040" cy="320040"/>
           </a:xfrm>
           <a:prstGeom prst="rect">
@@ -3474,13 +2986,13 @@
       </p:pic>
       <p:sp>
         <p:nvSpPr>
-          <p:cNvPr id="24" name="Text 18"/>
-          <p:cNvSpPr/>
-          <p:nvPr/>
-        </p:nvSpPr>
-        <p:spPr>
-          <a:xfrm>
-            <a:off x="5394960" y="3035808"/>
+          <p:cNvPr id="12" name="Text 8"/>
+          <p:cNvSpPr/>
+          <p:nvPr/>
+        </p:nvSpPr>
+        <p:spPr>
+          <a:xfrm>
+            <a:off x="5394960" y="1207008"/>
             <a:ext cx="3108960" cy="320040"/>
           </a:xfrm>
           <a:prstGeom prst="rect">
@@ -3493,7 +3005,7 @@
           <a:bodyPr wrap="square" lIns="0" tIns="0" rIns="0" bIns="0" rtlCol="0" anchor="ctr"/>
           <a:lstStyle/>
           <a:p>
-            <a:pPr indent="0" marL="0">
+            <a:pPr marL="0" indent="0">
               <a:buNone/>
             </a:pPr>
             <a:r>
@@ -3505,7 +3017,7 @@
                 <a:ea typeface="Trebuchet MS" pitchFamily="34" charset="-122"/>
                 <a:cs typeface="Trebuchet MS" pitchFamily="34" charset="-120"/>
               </a:rPr>
-              <a:t>RL CartPole Agent</a:t>
+              <a:t>RNN vs Transformer vs ViT</a:t>
             </a:r>
             <a:endParaRPr lang="en-US" sz="1400" dirty="0"/>
           </a:p>
@@ -3513,13 +3025,13 @@
       </p:sp>
       <p:sp>
         <p:nvSpPr>
-          <p:cNvPr id="25" name="Text 19"/>
-          <p:cNvSpPr/>
-          <p:nvPr/>
-        </p:nvSpPr>
-        <p:spPr>
-          <a:xfrm>
-            <a:off x="4983480" y="3429000"/>
+          <p:cNvPr id="13" name="Text 9"/>
+          <p:cNvSpPr/>
+          <p:nvPr/>
+        </p:nvSpPr>
+        <p:spPr>
+          <a:xfrm>
+            <a:off x="4983480" y="1600200"/>
             <a:ext cx="3474720" cy="685800"/>
           </a:xfrm>
           <a:prstGeom prst="rect">
@@ -3532,7 +3044,7 @@
           <a:bodyPr wrap="square" lIns="0" tIns="0" rIns="0" bIns="0" rtlCol="0" anchor="ctr"/>
           <a:lstStyle/>
           <a:p>
-            <a:pPr indent="0" marL="0">
+            <a:pPr marL="0" indent="0">
               <a:buNone/>
             </a:pPr>
             <a:r>
@@ -3544,6 +3056,410 @@
                 <a:ea typeface="Calibri" pitchFamily="34" charset="-122"/>
                 <a:cs typeface="Calibri" pitchFamily="34" charset="-120"/>
               </a:rPr>
+              <a:t>Compared three major architectures — LSTM/GRU, Transformers, and Vision Transformers — on text and image classification tasks.</a:t>
+            </a:r>
+            <a:endParaRPr lang="en-US" sz="1000" dirty="0"/>
+          </a:p>
+        </p:txBody>
+      </p:sp>
+      <p:sp>
+        <p:nvSpPr>
+          <p:cNvPr id="14" name="Text 10"/>
+          <p:cNvSpPr/>
+          <p:nvPr/>
+        </p:nvSpPr>
+        <p:spPr>
+          <a:xfrm>
+            <a:off x="4983480" y="2286000"/>
+            <a:ext cx="3474720" cy="274320"/>
+          </a:xfrm>
+          <a:prstGeom prst="rect">
+            <a:avLst/>
+          </a:prstGeom>
+          <a:noFill/>
+          <a:ln/>
+        </p:spPr>
+        <p:txBody>
+          <a:bodyPr wrap="square" lIns="0" tIns="0" rIns="0" bIns="0" rtlCol="0" anchor="ctr"/>
+          <a:lstStyle/>
+          <a:p>
+            <a:pPr marL="0" indent="0">
+              <a:buNone/>
+            </a:pPr>
+            <a:r>
+              <a:rPr lang="en-US" sz="900" b="1" dirty="0">
+                <a:solidFill>
+                  <a:srgbClr val="0891B2"/>
+                </a:solidFill>
+                <a:latin typeface="Calibri" pitchFamily="34" charset="0"/>
+                <a:ea typeface="Calibri" pitchFamily="34" charset="-122"/>
+                <a:cs typeface="Calibri" pitchFamily="34" charset="-120"/>
+              </a:rPr>
+              <a:t>PyTorch · Attention · ViT</a:t>
+            </a:r>
+            <a:endParaRPr lang="en-US" sz="900" dirty="0"/>
+          </a:p>
+        </p:txBody>
+      </p:sp>
+      <p:sp>
+        <p:nvSpPr>
+          <p:cNvPr id="15" name="Shape 11"/>
+          <p:cNvSpPr/>
+          <p:nvPr/>
+        </p:nvSpPr>
+        <p:spPr>
+          <a:xfrm>
+            <a:off x="457200" y="2926080"/>
+            <a:ext cx="3931920" cy="1554480"/>
+          </a:xfrm>
+          <a:prstGeom prst="rect">
+            <a:avLst/>
+          </a:prstGeom>
+          <a:solidFill>
+            <a:srgbClr val="F8FAFC"/>
+          </a:solidFill>
+          <a:ln/>
+          <a:effectLst>
+            <a:outerShdw blurRad="101600" dist="38100" dir="8100000" algn="bl" rotWithShape="0">
+              <a:srgbClr val="000000">
+                <a:alpha val="20000"/>
+              </a:srgbClr>
+            </a:outerShdw>
+          </a:effectLst>
+        </p:spPr>
+        <p:txBody>
+          <a:bodyPr/>
+          <a:lstStyle/>
+          <a:p>
+            <a:endParaRPr lang="en-US"/>
+          </a:p>
+        </p:txBody>
+      </p:sp>
+      <p:sp>
+        <p:nvSpPr>
+          <p:cNvPr id="16" name="Shape 12"/>
+          <p:cNvSpPr/>
+          <p:nvPr/>
+        </p:nvSpPr>
+        <p:spPr>
+          <a:xfrm>
+            <a:off x="457200" y="2926080"/>
+            <a:ext cx="54864" cy="1554480"/>
+          </a:xfrm>
+          <a:prstGeom prst="rect">
+            <a:avLst/>
+          </a:prstGeom>
+          <a:solidFill>
+            <a:srgbClr val="0891B2"/>
+          </a:solidFill>
+          <a:ln/>
+        </p:spPr>
+        <p:txBody>
+          <a:bodyPr/>
+          <a:lstStyle/>
+          <a:p>
+            <a:endParaRPr lang="en-US"/>
+          </a:p>
+        </p:txBody>
+      </p:sp>
+      <p:pic>
+        <p:nvPicPr>
+          <p:cNvPr id="17" name="Image 2" descr="preencoded.png"/>
+          <p:cNvPicPr>
+            <a:picLocks noChangeAspect="1"/>
+          </p:cNvPicPr>
+          <p:nvPr/>
+        </p:nvPicPr>
+        <p:blipFill>
+          <a:blip r:embed="rId5"/>
+          <a:stretch>
+            <a:fillRect/>
+          </a:stretch>
+        </p:blipFill>
+        <p:spPr>
+          <a:xfrm>
+            <a:off x="685800" y="3063240"/>
+            <a:ext cx="320040" cy="320040"/>
+          </a:xfrm>
+          <a:prstGeom prst="rect">
+            <a:avLst/>
+          </a:prstGeom>
+        </p:spPr>
+      </p:pic>
+      <p:sp>
+        <p:nvSpPr>
+          <p:cNvPr id="18" name="Text 13"/>
+          <p:cNvSpPr/>
+          <p:nvPr/>
+        </p:nvSpPr>
+        <p:spPr>
+          <a:xfrm>
+            <a:off x="1097280" y="3035808"/>
+            <a:ext cx="3108960" cy="320040"/>
+          </a:xfrm>
+          <a:prstGeom prst="rect">
+            <a:avLst/>
+          </a:prstGeom>
+          <a:noFill/>
+          <a:ln/>
+        </p:spPr>
+        <p:txBody>
+          <a:bodyPr wrap="square" lIns="0" tIns="0" rIns="0" bIns="0" rtlCol="0" anchor="ctr"/>
+          <a:lstStyle/>
+          <a:p>
+            <a:pPr marL="0" indent="0">
+              <a:buNone/>
+            </a:pPr>
+            <a:r>
+              <a:rPr lang="en-US" sz="1400" b="1" dirty="0">
+                <a:solidFill>
+                  <a:srgbClr val="0A1628"/>
+                </a:solidFill>
+                <a:latin typeface="Trebuchet MS" pitchFamily="34" charset="0"/>
+                <a:ea typeface="Trebuchet MS" pitchFamily="34" charset="-122"/>
+                <a:cs typeface="Trebuchet MS" pitchFamily="34" charset="-120"/>
+              </a:rPr>
+              <a:t>CNN Image Classification</a:t>
+            </a:r>
+            <a:endParaRPr lang="en-US" sz="1400" dirty="0"/>
+          </a:p>
+        </p:txBody>
+      </p:sp>
+      <p:sp>
+        <p:nvSpPr>
+          <p:cNvPr id="19" name="Text 14"/>
+          <p:cNvSpPr/>
+          <p:nvPr/>
+        </p:nvSpPr>
+        <p:spPr>
+          <a:xfrm>
+            <a:off x="685800" y="3429000"/>
+            <a:ext cx="3474720" cy="685800"/>
+          </a:xfrm>
+          <a:prstGeom prst="rect">
+            <a:avLst/>
+          </a:prstGeom>
+          <a:noFill/>
+          <a:ln/>
+        </p:spPr>
+        <p:txBody>
+          <a:bodyPr wrap="square" lIns="0" tIns="0" rIns="0" bIns="0" rtlCol="0" anchor="ctr"/>
+          <a:lstStyle/>
+          <a:p>
+            <a:pPr marL="0" indent="0">
+              <a:buNone/>
+            </a:pPr>
+            <a:r>
+              <a:rPr lang="en-US" sz="1000" dirty="0">
+                <a:solidFill>
+                  <a:srgbClr val="334155"/>
+                </a:solidFill>
+                <a:latin typeface="Calibri" pitchFamily="34" charset="0"/>
+                <a:ea typeface="Calibri" pitchFamily="34" charset="-122"/>
+                <a:cs typeface="Calibri" pitchFamily="34" charset="-120"/>
+              </a:rPr>
+              <a:t>Built a CNN for binary classification (Puppy vs Bagel) with data augmentation and transfer learning techniques.</a:t>
+            </a:r>
+            <a:endParaRPr lang="en-US" sz="1000" dirty="0"/>
+          </a:p>
+        </p:txBody>
+      </p:sp>
+      <p:sp>
+        <p:nvSpPr>
+          <p:cNvPr id="20" name="Text 15"/>
+          <p:cNvSpPr/>
+          <p:nvPr/>
+        </p:nvSpPr>
+        <p:spPr>
+          <a:xfrm>
+            <a:off x="685800" y="4114800"/>
+            <a:ext cx="3474720" cy="274320"/>
+          </a:xfrm>
+          <a:prstGeom prst="rect">
+            <a:avLst/>
+          </a:prstGeom>
+          <a:noFill/>
+          <a:ln/>
+        </p:spPr>
+        <p:txBody>
+          <a:bodyPr wrap="square" lIns="0" tIns="0" rIns="0" bIns="0" rtlCol="0" anchor="ctr"/>
+          <a:lstStyle/>
+          <a:p>
+            <a:pPr marL="0" indent="0">
+              <a:buNone/>
+            </a:pPr>
+            <a:r>
+              <a:rPr lang="en-US" sz="900" b="1" dirty="0">
+                <a:solidFill>
+                  <a:srgbClr val="0891B2"/>
+                </a:solidFill>
+                <a:latin typeface="Calibri" pitchFamily="34" charset="0"/>
+                <a:ea typeface="Calibri" pitchFamily="34" charset="-122"/>
+                <a:cs typeface="Calibri" pitchFamily="34" charset="-120"/>
+              </a:rPr>
+              <a:t>TensorFlow · Keras · CNN</a:t>
+            </a:r>
+            <a:endParaRPr lang="en-US" sz="900" dirty="0"/>
+          </a:p>
+        </p:txBody>
+      </p:sp>
+      <p:sp>
+        <p:nvSpPr>
+          <p:cNvPr id="21" name="Shape 16"/>
+          <p:cNvSpPr/>
+          <p:nvPr/>
+        </p:nvSpPr>
+        <p:spPr>
+          <a:xfrm>
+            <a:off x="4754880" y="2926080"/>
+            <a:ext cx="3931920" cy="1554480"/>
+          </a:xfrm>
+          <a:prstGeom prst="rect">
+            <a:avLst/>
+          </a:prstGeom>
+          <a:solidFill>
+            <a:srgbClr val="F8FAFC"/>
+          </a:solidFill>
+          <a:ln/>
+          <a:effectLst>
+            <a:outerShdw blurRad="101600" dist="38100" dir="8100000" algn="bl" rotWithShape="0">
+              <a:srgbClr val="000000">
+                <a:alpha val="20000"/>
+              </a:srgbClr>
+            </a:outerShdw>
+          </a:effectLst>
+        </p:spPr>
+        <p:txBody>
+          <a:bodyPr/>
+          <a:lstStyle/>
+          <a:p>
+            <a:endParaRPr lang="en-US"/>
+          </a:p>
+        </p:txBody>
+      </p:sp>
+      <p:sp>
+        <p:nvSpPr>
+          <p:cNvPr id="22" name="Shape 17"/>
+          <p:cNvSpPr/>
+          <p:nvPr/>
+        </p:nvSpPr>
+        <p:spPr>
+          <a:xfrm>
+            <a:off x="4754880" y="2926080"/>
+            <a:ext cx="54864" cy="1554480"/>
+          </a:xfrm>
+          <a:prstGeom prst="rect">
+            <a:avLst/>
+          </a:prstGeom>
+          <a:solidFill>
+            <a:srgbClr val="0891B2"/>
+          </a:solidFill>
+          <a:ln/>
+        </p:spPr>
+        <p:txBody>
+          <a:bodyPr/>
+          <a:lstStyle/>
+          <a:p>
+            <a:endParaRPr lang="en-US"/>
+          </a:p>
+        </p:txBody>
+      </p:sp>
+      <p:pic>
+        <p:nvPicPr>
+          <p:cNvPr id="23" name="Image 3" descr="preencoded.png"/>
+          <p:cNvPicPr>
+            <a:picLocks noChangeAspect="1"/>
+          </p:cNvPicPr>
+          <p:nvPr/>
+        </p:nvPicPr>
+        <p:blipFill>
+          <a:blip r:embed="rId6"/>
+          <a:stretch>
+            <a:fillRect/>
+          </a:stretch>
+        </p:blipFill>
+        <p:spPr>
+          <a:xfrm>
+            <a:off x="4983480" y="3063240"/>
+            <a:ext cx="320040" cy="320040"/>
+          </a:xfrm>
+          <a:prstGeom prst="rect">
+            <a:avLst/>
+          </a:prstGeom>
+        </p:spPr>
+      </p:pic>
+      <p:sp>
+        <p:nvSpPr>
+          <p:cNvPr id="24" name="Text 18"/>
+          <p:cNvSpPr/>
+          <p:nvPr/>
+        </p:nvSpPr>
+        <p:spPr>
+          <a:xfrm>
+            <a:off x="5394960" y="3035808"/>
+            <a:ext cx="3108960" cy="320040"/>
+          </a:xfrm>
+          <a:prstGeom prst="rect">
+            <a:avLst/>
+          </a:prstGeom>
+          <a:noFill/>
+          <a:ln/>
+        </p:spPr>
+        <p:txBody>
+          <a:bodyPr wrap="square" lIns="0" tIns="0" rIns="0" bIns="0" rtlCol="0" anchor="ctr"/>
+          <a:lstStyle/>
+          <a:p>
+            <a:pPr marL="0" indent="0">
+              <a:buNone/>
+            </a:pPr>
+            <a:r>
+              <a:rPr lang="en-US" sz="1400" b="1" dirty="0">
+                <a:solidFill>
+                  <a:srgbClr val="0A1628"/>
+                </a:solidFill>
+                <a:latin typeface="Trebuchet MS" pitchFamily="34" charset="0"/>
+                <a:ea typeface="Trebuchet MS" pitchFamily="34" charset="-122"/>
+                <a:cs typeface="Trebuchet MS" pitchFamily="34" charset="-120"/>
+              </a:rPr>
+              <a:t>RL CartPole Agent</a:t>
+            </a:r>
+            <a:endParaRPr lang="en-US" sz="1400" dirty="0"/>
+          </a:p>
+        </p:txBody>
+      </p:sp>
+      <p:sp>
+        <p:nvSpPr>
+          <p:cNvPr id="25" name="Text 19"/>
+          <p:cNvSpPr/>
+          <p:nvPr/>
+        </p:nvSpPr>
+        <p:spPr>
+          <a:xfrm>
+            <a:off x="4983480" y="3429000"/>
+            <a:ext cx="3474720" cy="685800"/>
+          </a:xfrm>
+          <a:prstGeom prst="rect">
+            <a:avLst/>
+          </a:prstGeom>
+          <a:noFill/>
+          <a:ln/>
+        </p:spPr>
+        <p:txBody>
+          <a:bodyPr wrap="square" lIns="0" tIns="0" rIns="0" bIns="0" rtlCol="0" anchor="ctr"/>
+          <a:lstStyle/>
+          <a:p>
+            <a:pPr marL="0" indent="0">
+              <a:buNone/>
+            </a:pPr>
+            <a:r>
+              <a:rPr lang="en-US" sz="1000" dirty="0">
+                <a:solidFill>
+                  <a:srgbClr val="334155"/>
+                </a:solidFill>
+                <a:latin typeface="Calibri" pitchFamily="34" charset="0"/>
+                <a:ea typeface="Calibri" pitchFamily="34" charset="-122"/>
+                <a:cs typeface="Calibri" pitchFamily="34" charset="-120"/>
+              </a:rPr>
               <a:t>Implemented Q-Learning to train an agent to balance a pole, comparing learned behavior against a random baseline.</a:t>
             </a:r>
             <a:endParaRPr lang="en-US" sz="1000" dirty="0"/>
@@ -3571,7 +3487,7 @@
           <a:bodyPr wrap="square" lIns="0" tIns="0" rIns="0" bIns="0" rtlCol="0" anchor="ctr"/>
           <a:lstStyle/>
           <a:p>
-            <a:pPr indent="0" marL="0">
+            <a:pPr marL="0" indent="0">
               <a:buNone/>
             </a:pPr>
             <a:r>
@@ -3605,6 +3521,7 @@
         <a:solidFill>
           <a:srgbClr val="FFFFFF"/>
         </a:solidFill>
+        <a:effectLst/>
       </p:bgPr>
     </p:bg>
     <p:spTree>
@@ -3642,7 +3559,7 @@
           <a:bodyPr wrap="square" lIns="0" tIns="0" rIns="0" bIns="0" rtlCol="0" anchor="ctr"/>
           <a:lstStyle/>
           <a:p>
-            <a:pPr indent="0" marL="0">
+            <a:pPr marL="0" indent="0">
               <a:buNone/>
             </a:pPr>
             <a:r>
@@ -3681,7 +3598,7 @@
           <a:bodyPr wrap="square" lIns="0" tIns="0" rIns="0" bIns="0" rtlCol="0" anchor="ctr"/>
           <a:lstStyle/>
           <a:p>
-            <a:pPr algn="r" indent="0" marL="0">
+            <a:pPr marL="0" indent="0" algn="r">
               <a:buNone/>
             </a:pPr>
             <a:r>
@@ -3720,6 +3637,13 @@
           </a:solidFill>
           <a:ln/>
         </p:spPr>
+        <p:txBody>
+          <a:bodyPr/>
+          <a:lstStyle/>
+          <a:p>
+            <a:endParaRPr lang="en-US"/>
+          </a:p>
+        </p:txBody>
       </p:sp>
       <p:sp>
         <p:nvSpPr>
@@ -3742,6 +3666,13 @@
           </a:solidFill>
           <a:ln/>
         </p:spPr>
+        <p:txBody>
+          <a:bodyPr/>
+          <a:lstStyle/>
+          <a:p>
+            <a:endParaRPr lang="en-US"/>
+          </a:p>
+        </p:txBody>
       </p:sp>
       <p:sp>
         <p:nvSpPr>
@@ -3764,7 +3695,7 @@
           <a:bodyPr wrap="square" lIns="0" tIns="0" rIns="0" bIns="0" rtlCol="0" anchor="ctr"/>
           <a:lstStyle/>
           <a:p>
-            <a:pPr algn="r" indent="0" marL="0">
+            <a:pPr marL="0" indent="0" algn="r">
               <a:buNone/>
             </a:pPr>
             <a:r>
@@ -3803,6 +3734,13 @@
           </a:solidFill>
           <a:ln/>
         </p:spPr>
+        <p:txBody>
+          <a:bodyPr/>
+          <a:lstStyle/>
+          <a:p>
+            <a:endParaRPr lang="en-US"/>
+          </a:p>
+        </p:txBody>
       </p:sp>
       <p:sp>
         <p:nvSpPr>
@@ -3825,6 +3763,13 @@
           </a:solidFill>
           <a:ln/>
         </p:spPr>
+        <p:txBody>
+          <a:bodyPr/>
+          <a:lstStyle/>
+          <a:p>
+            <a:endParaRPr lang="en-US"/>
+          </a:p>
+        </p:txBody>
       </p:sp>
       <p:sp>
         <p:nvSpPr>
@@ -3847,7 +3792,7 @@
           <a:bodyPr wrap="square" lIns="0" tIns="0" rIns="0" bIns="0" rtlCol="0" anchor="ctr"/>
           <a:lstStyle/>
           <a:p>
-            <a:pPr algn="r" indent="0" marL="0">
+            <a:pPr marL="0" indent="0" algn="r">
               <a:buNone/>
             </a:pPr>
             <a:r>
@@ -3886,6 +3831,13 @@
           </a:solidFill>
           <a:ln/>
         </p:spPr>
+        <p:txBody>
+          <a:bodyPr/>
+          <a:lstStyle/>
+          <a:p>
+            <a:endParaRPr lang="en-US"/>
+          </a:p>
+        </p:txBody>
       </p:sp>
       <p:sp>
         <p:nvSpPr>
@@ -3908,6 +3860,13 @@
           </a:solidFill>
           <a:ln/>
         </p:spPr>
+        <p:txBody>
+          <a:bodyPr/>
+          <a:lstStyle/>
+          <a:p>
+            <a:endParaRPr lang="en-US"/>
+          </a:p>
+        </p:txBody>
       </p:sp>
       <p:sp>
         <p:nvSpPr>
@@ -3930,7 +3889,7 @@
           <a:bodyPr wrap="square" lIns="0" tIns="0" rIns="0" bIns="0" rtlCol="0" anchor="ctr"/>
           <a:lstStyle/>
           <a:p>
-            <a:pPr algn="r" indent="0" marL="0">
+            <a:pPr marL="0" indent="0" algn="r">
               <a:buNone/>
             </a:pPr>
             <a:r>
@@ -3969,6 +3928,13 @@
           </a:solidFill>
           <a:ln/>
         </p:spPr>
+        <p:txBody>
+          <a:bodyPr/>
+          <a:lstStyle/>
+          <a:p>
+            <a:endParaRPr lang="en-US"/>
+          </a:p>
+        </p:txBody>
       </p:sp>
       <p:sp>
         <p:nvSpPr>
@@ -3991,6 +3957,13 @@
           </a:solidFill>
           <a:ln/>
         </p:spPr>
+        <p:txBody>
+          <a:bodyPr/>
+          <a:lstStyle/>
+          <a:p>
+            <a:endParaRPr lang="en-US"/>
+          </a:p>
+        </p:txBody>
       </p:sp>
       <p:sp>
         <p:nvSpPr>
@@ -4013,7 +3986,7 @@
           <a:bodyPr wrap="square" lIns="0" tIns="0" rIns="0" bIns="0" rtlCol="0" anchor="ctr"/>
           <a:lstStyle/>
           <a:p>
-            <a:pPr algn="r" indent="0" marL="0">
+            <a:pPr marL="0" indent="0" algn="r">
               <a:buNone/>
             </a:pPr>
             <a:r>
@@ -4052,6 +4025,13 @@
           </a:solidFill>
           <a:ln/>
         </p:spPr>
+        <p:txBody>
+          <a:bodyPr/>
+          <a:lstStyle/>
+          <a:p>
+            <a:endParaRPr lang="en-US"/>
+          </a:p>
+        </p:txBody>
       </p:sp>
       <p:sp>
         <p:nvSpPr>
@@ -4074,6 +4054,13 @@
           </a:solidFill>
           <a:ln/>
         </p:spPr>
+        <p:txBody>
+          <a:bodyPr/>
+          <a:lstStyle/>
+          <a:p>
+            <a:endParaRPr lang="en-US"/>
+          </a:p>
+        </p:txBody>
       </p:sp>
       <p:sp>
         <p:nvSpPr>
@@ -4096,7 +4083,7 @@
           <a:bodyPr wrap="square" lIns="0" tIns="0" rIns="0" bIns="0" rtlCol="0" anchor="ctr"/>
           <a:lstStyle/>
           <a:p>
-            <a:pPr algn="r" indent="0" marL="0">
+            <a:pPr marL="0" indent="0" algn="r">
               <a:buNone/>
             </a:pPr>
             <a:r>
@@ -4135,6 +4122,13 @@
           </a:solidFill>
           <a:ln/>
         </p:spPr>
+        <p:txBody>
+          <a:bodyPr/>
+          <a:lstStyle/>
+          <a:p>
+            <a:endParaRPr lang="en-US"/>
+          </a:p>
+        </p:txBody>
       </p:sp>
       <p:sp>
         <p:nvSpPr>
@@ -4157,6 +4151,13 @@
           </a:solidFill>
           <a:ln/>
         </p:spPr>
+        <p:txBody>
+          <a:bodyPr/>
+          <a:lstStyle/>
+          <a:p>
+            <a:endParaRPr lang="en-US"/>
+          </a:p>
+        </p:txBody>
       </p:sp>
       <p:sp>
         <p:nvSpPr>
@@ -4179,7 +4180,7 @@
           <a:bodyPr wrap="square" lIns="0" tIns="0" rIns="0" bIns="0" rtlCol="0" anchor="ctr"/>
           <a:lstStyle/>
           <a:p>
-            <a:pPr algn="r" indent="0" marL="0">
+            <a:pPr marL="0" indent="0" algn="r">
               <a:buNone/>
             </a:pPr>
             <a:r>
@@ -4218,6 +4219,13 @@
           </a:solidFill>
           <a:ln/>
         </p:spPr>
+        <p:txBody>
+          <a:bodyPr/>
+          <a:lstStyle/>
+          <a:p>
+            <a:endParaRPr lang="en-US"/>
+          </a:p>
+        </p:txBody>
       </p:sp>
       <p:sp>
         <p:nvSpPr>
@@ -4240,6 +4248,13 @@
           </a:solidFill>
           <a:ln/>
         </p:spPr>
+        <p:txBody>
+          <a:bodyPr/>
+          <a:lstStyle/>
+          <a:p>
+            <a:endParaRPr lang="en-US"/>
+          </a:p>
+        </p:txBody>
       </p:sp>
       <p:sp>
         <p:nvSpPr>
@@ -4262,7 +4277,7 @@
           <a:bodyPr wrap="square" lIns="0" tIns="0" rIns="0" bIns="0" rtlCol="0" anchor="ctr"/>
           <a:lstStyle/>
           <a:p>
-            <a:pPr algn="r" indent="0" marL="0">
+            <a:pPr marL="0" indent="0" algn="r">
               <a:buNone/>
             </a:pPr>
             <a:r>
@@ -4301,6 +4316,13 @@
           </a:solidFill>
           <a:ln/>
         </p:spPr>
+        <p:txBody>
+          <a:bodyPr/>
+          <a:lstStyle/>
+          <a:p>
+            <a:endParaRPr lang="en-US"/>
+          </a:p>
+        </p:txBody>
       </p:sp>
       <p:sp>
         <p:nvSpPr>
@@ -4323,11 +4345,18 @@
           </a:solidFill>
           <a:ln/>
         </p:spPr>
+        <p:txBody>
+          <a:bodyPr/>
+          <a:lstStyle/>
+          <a:p>
+            <a:endParaRPr lang="en-US"/>
+          </a:p>
+        </p:txBody>
       </p:sp>
       <p:sp>
         <p:nvSpPr>
           <p:cNvPr id="27" name="Text 25">
-            <a:hlinkClick r:id="rId1" tooltip=""/>
+            <a:hlinkClick r:id="rId3"/>
           </p:cNvPr>
           <p:cNvSpPr/>
           <p:nvPr/>
@@ -4347,7 +4376,7 @@
           <a:bodyPr wrap="square" lIns="0" tIns="0" rIns="0" bIns="0" rtlCol="0" anchor="ctr"/>
           <a:lstStyle/>
           <a:p>
-            <a:pPr indent="0" marL="0">
+            <a:pPr marL="0" indent="0">
               <a:buNone/>
             </a:pPr>
             <a:r>
@@ -4358,7 +4387,7 @@
                 <a:latin typeface="Calibri" pitchFamily="34" charset="0"/>
                 <a:ea typeface="Calibri" pitchFamily="34" charset="-122"/>
                 <a:cs typeface="Calibri" pitchFamily="34" charset="-120"/>
-                <a:hlinkClick r:id="rId1" invalidUrl="" action="" tgtFrame="" tooltip="" history="1" highlightClick="0" endSnd="0">
+                <a:hlinkClick r:id="rId3">
                   <a:extLst>
                     <a:ext uri="{A12FA001-AC4F-418D-AE19-62706E023703}">
                       <ahyp:hlinkClr xmlns:ahyp="http://schemas.microsoft.com/office/drawing/2018/hyperlinkcolor" val="tx"/>
@@ -4388,6 +4417,7 @@
         <a:solidFill>
           <a:srgbClr val="0A1628"/>
         </a:solidFill>
+        <a:effectLst/>
       </p:bgPr>
     </p:bg>
     <p:spTree>
@@ -4423,6 +4453,13 @@
           </a:solidFill>
           <a:ln/>
         </p:spPr>
+        <p:txBody>
+          <a:bodyPr/>
+          <a:lstStyle/>
+          <a:p>
+            <a:endParaRPr lang="en-US"/>
+          </a:p>
+        </p:txBody>
       </p:sp>
       <p:sp>
         <p:nvSpPr>
@@ -4445,7 +4482,7 @@
           <a:bodyPr wrap="square" lIns="0" tIns="0" rIns="0" bIns="0" rtlCol="0" anchor="ctr"/>
           <a:lstStyle/>
           <a:p>
-            <a:pPr indent="0" marL="0">
+            <a:pPr marL="0" indent="0">
               <a:buNone/>
             </a:pPr>
             <a:r>
@@ -4462,7 +4499,7 @@
             <a:endParaRPr lang="en-US" sz="3000" dirty="0"/>
           </a:p>
           <a:p>
-            <a:pPr indent="0" marL="0">
+            <a:pPr marL="0" indent="0">
               <a:buNone/>
             </a:pPr>
             <a:r>
@@ -4501,7 +4538,7 @@
           <a:bodyPr wrap="square" lIns="0" tIns="0" rIns="0" bIns="0" rtlCol="0" anchor="ctr"/>
           <a:lstStyle/>
           <a:p>
-            <a:pPr indent="0" marL="0">
+            <a:pPr marL="0" indent="0">
               <a:buNone/>
             </a:pPr>
             <a:r>
@@ -4540,7 +4577,7 @@
           <a:bodyPr wrap="square" lIns="0" tIns="0" rIns="0" bIns="0" rtlCol="0" anchor="ctr"/>
           <a:lstStyle/>
           <a:p>
-            <a:pPr indent="0" marL="0">
+            <a:pPr marL="0" indent="0">
               <a:buNone/>
             </a:pPr>
             <a:r>
@@ -4664,7 +4701,7 @@
           <a:bodyPr wrap="square" lIns="0" tIns="0" rIns="0" bIns="0" rtlCol="0" anchor="ctr"/>
           <a:lstStyle/>
           <a:p>
-            <a:pPr algn="ctr" indent="0" marL="0">
+            <a:pPr marL="0" indent="0" algn="ctr">
               <a:buNone/>
             </a:pPr>
             <a:r>
@@ -4684,79 +4721,7 @@
       </p:sp>
       <p:pic>
         <p:nvPicPr>
-          <p:cNvPr id="8" name="Image 0" descr="preencoded.png">    </p:cNvPr>
-          <p:cNvPicPr>
-            <a:picLocks noChangeAspect="1"/>
-          </p:cNvPicPr>
-          <p:nvPr/>
-        </p:nvPicPr>
-        <p:blipFill>
-          <a:blip r:embed="rId1"/>
-          <a:stretch>
-            <a:fillRect/>
-          </a:stretch>
-        </p:blipFill>
-        <p:spPr>
-          <a:xfrm>
-            <a:off x="6583680" y="2103120"/>
-            <a:ext cx="274320" cy="274320"/>
-          </a:xfrm>
-          <a:prstGeom prst="rect">
-            <a:avLst/>
-          </a:prstGeom>
-        </p:spPr>
-      </p:pic>
-      <p:sp>
-        <p:nvSpPr>
-          <p:cNvPr id="9" name="Text 6">
-            <a:hlinkClick r:id="rId2" tooltip=""/>
-          </p:cNvPr>
-          <p:cNvSpPr/>
-          <p:nvPr/>
-        </p:nvSpPr>
-        <p:spPr>
-          <a:xfrm>
-            <a:off x="6949440" y="2103120"/>
-            <a:ext cx="1828800" cy="274320"/>
-          </a:xfrm>
-          <a:prstGeom prst="rect">
-            <a:avLst/>
-          </a:prstGeom>
-          <a:noFill/>
-          <a:ln/>
-        </p:spPr>
-        <p:txBody>
-          <a:bodyPr wrap="square" lIns="0" tIns="0" rIns="0" bIns="0" rtlCol="0" anchor="ctr"/>
-          <a:lstStyle/>
-          <a:p>
-            <a:pPr indent="0" marL="0">
-              <a:buNone/>
-            </a:pPr>
-            <a:r>
-              <a:rPr lang="en-US" sz="1200" u="sng" dirty="0">
-                <a:solidFill>
-                  <a:srgbClr val="06B6D4"/>
-                </a:solidFill>
-                <a:latin typeface="Calibri" pitchFamily="34" charset="0"/>
-                <a:ea typeface="Calibri" pitchFamily="34" charset="-122"/>
-                <a:cs typeface="Calibri" pitchFamily="34" charset="-120"/>
-                <a:hlinkClick r:id="rId2" invalidUrl="" action="" tgtFrame="" tooltip="" history="1" highlightClick="0" endSnd="0">
-                  <a:extLst>
-                    <a:ext uri="{A12FA001-AC4F-418D-AE19-62706E023703}">
-                      <ahyp:hlinkClr xmlns:ahyp="http://schemas.microsoft.com/office/drawing/2018/hyperlinkcolor" val="tx"/>
-                    </a:ext>
-                  </a:extLst>
-                </a:hlinkClick>
-              </a:rPr>
-              <a:t>erickxllx</a:t>
-            </a:r>
-            <a:endParaRPr lang="en-US" sz="1200" dirty="0"/>
-          </a:p>
-        </p:txBody>
-      </p:sp>
-      <p:pic>
-        <p:nvPicPr>
-          <p:cNvPr id="10" name="Image 1" descr="preencoded.png">    </p:cNvPr>
+          <p:cNvPr id="8" name="Image 0" descr="preencoded.png"/>
           <p:cNvPicPr>
             <a:picLocks noChangeAspect="1"/>
           </p:cNvPicPr>
@@ -4770,7 +4735,7 @@
         </p:blipFill>
         <p:spPr>
           <a:xfrm>
-            <a:off x="6583680" y="2560320"/>
+            <a:off x="6583680" y="2103120"/>
             <a:ext cx="274320" cy="274320"/>
           </a:xfrm>
           <a:prstGeom prst="rect">
@@ -4780,14 +4745,16 @@
       </p:pic>
       <p:sp>
         <p:nvSpPr>
-          <p:cNvPr id="11" name="Text 7"/>
-          <p:cNvSpPr/>
-          <p:nvPr/>
-        </p:nvSpPr>
-        <p:spPr>
-          <a:xfrm>
-            <a:off x="6949440" y="2560320"/>
-            <a:ext cx="2011680" cy="274320"/>
+          <p:cNvPr id="9" name="Text 6">
+            <a:hlinkClick r:id="rId4"/>
+          </p:cNvPr>
+          <p:cNvSpPr/>
+          <p:nvPr/>
+        </p:nvSpPr>
+        <p:spPr>
+          <a:xfrm>
+            <a:off x="6949440" y="2103120"/>
+            <a:ext cx="1828800" cy="274320"/>
           </a:xfrm>
           <a:prstGeom prst="rect">
             <a:avLst/>
@@ -4799,81 +4766,18 @@
           <a:bodyPr wrap="square" lIns="0" tIns="0" rIns="0" bIns="0" rtlCol="0" anchor="ctr"/>
           <a:lstStyle/>
           <a:p>
-            <a:pPr indent="0" marL="0">
-              <a:buNone/>
-            </a:pPr>
-            <a:r>
-              <a:rPr lang="en-US" sz="1200" dirty="0">
+            <a:pPr marL="0" indent="0">
+              <a:buNone/>
+            </a:pPr>
+            <a:r>
+              <a:rPr lang="en-US" sz="1200" u="sng" dirty="0">
                 <a:solidFill>
                   <a:srgbClr val="06B6D4"/>
                 </a:solidFill>
                 <a:latin typeface="Calibri" pitchFamily="34" charset="0"/>
                 <a:ea typeface="Calibri" pitchFamily="34" charset="-122"/>
                 <a:cs typeface="Calibri" pitchFamily="34" charset="-120"/>
-              </a:rPr>
-              <a:t>erickbanegas@email.com</a:t>
-            </a:r>
-            <a:endParaRPr lang="en-US" sz="1200" dirty="0"/>
-          </a:p>
-        </p:txBody>
-      </p:sp>
-      <p:sp>
-        <p:nvSpPr>
-          <p:cNvPr id="12" name="Shape 8"/>
-          <p:cNvSpPr/>
-          <p:nvPr/>
-        </p:nvSpPr>
-        <p:spPr>
-          <a:xfrm>
-            <a:off x="6309360" y="3383280"/>
-            <a:ext cx="2560320" cy="822960"/>
-          </a:xfrm>
-          <a:prstGeom prst="roundRect">
-            <a:avLst>
-              <a:gd name="adj" fmla="val 11111"/>
-            </a:avLst>
-          </a:prstGeom>
-          <a:solidFill>
-            <a:srgbClr val="0891B2"/>
-          </a:solidFill>
-          <a:ln/>
-        </p:spPr>
-      </p:sp>
-      <p:sp>
-        <p:nvSpPr>
-          <p:cNvPr id="13" name="Text 9">
-            <a:hlinkClick r:id="rId4" tooltip=""/>
-          </p:cNvPr>
-          <p:cNvSpPr/>
-          <p:nvPr/>
-        </p:nvSpPr>
-        <p:spPr>
-          <a:xfrm>
-            <a:off x="6309360" y="3383280"/>
-            <a:ext cx="2560320" cy="822960"/>
-          </a:xfrm>
-          <a:prstGeom prst="rect">
-            <a:avLst/>
-          </a:prstGeom>
-          <a:noFill/>
-          <a:ln/>
-        </p:spPr>
-        <p:txBody>
-          <a:bodyPr wrap="square" lIns="0" tIns="0" rIns="0" bIns="0" rtlCol="0" anchor="ctr"/>
-          <a:lstStyle/>
-          <a:p>
-            <a:pPr algn="ctr" indent="0" marL="0">
-              <a:buNone/>
-            </a:pPr>
-            <a:r>
-              <a:rPr lang="en-US" sz="1200" b="1" u="sng" dirty="0">
-                <a:solidFill>
-                  <a:srgbClr val="FFFFFF"/>
-                </a:solidFill>
-                <a:latin typeface="Calibri" pitchFamily="34" charset="0"/>
-                <a:ea typeface="Calibri" pitchFamily="34" charset="-122"/>
-                <a:cs typeface="Calibri" pitchFamily="34" charset="-120"/>
-                <a:hlinkClick r:id="rId4" invalidUrl="" action="" tgtFrame="" tooltip="" history="1" highlightClick="0" endSnd="0">
+                <a:hlinkClick r:id="rId4">
                   <a:extLst>
                     <a:ext uri="{A12FA001-AC4F-418D-AE19-62706E023703}">
                       <ahyp:hlinkClr xmlns:ahyp="http://schemas.microsoft.com/office/drawing/2018/hyperlinkcolor" val="tx"/>
@@ -4881,23 +4785,163 @@
                   </a:extLst>
                 </a:hlinkClick>
               </a:rPr>
-              <a:t>VIEW PORTFOLIO</a:t>
+              <a:t>erickxllx</a:t>
             </a:r>
             <a:endParaRPr lang="en-US" sz="1200" dirty="0"/>
           </a:p>
-          <a:p>
-            <a:pPr algn="ctr" indent="0" marL="0">
-              <a:buNone/>
-            </a:pPr>
-            <a:r>
-              <a:rPr lang="en-US" sz="1200" b="1" u="sng" dirty="0">
-                <a:solidFill>
-                  <a:srgbClr val="FFFFFF"/>
+        </p:txBody>
+      </p:sp>
+      <p:pic>
+        <p:nvPicPr>
+          <p:cNvPr id="10" name="Image 1" descr="preencoded.png"/>
+          <p:cNvPicPr>
+            <a:picLocks noChangeAspect="1"/>
+          </p:cNvPicPr>
+          <p:nvPr/>
+        </p:nvPicPr>
+        <p:blipFill>
+          <a:blip r:embed="rId5"/>
+          <a:stretch>
+            <a:fillRect/>
+          </a:stretch>
+        </p:blipFill>
+        <p:spPr>
+          <a:xfrm>
+            <a:off x="6583680" y="2560320"/>
+            <a:ext cx="274320" cy="274320"/>
+          </a:xfrm>
+          <a:prstGeom prst="rect">
+            <a:avLst/>
+          </a:prstGeom>
+        </p:spPr>
+      </p:pic>
+      <p:sp>
+        <p:nvSpPr>
+          <p:cNvPr id="11" name="Text 7"/>
+          <p:cNvSpPr/>
+          <p:nvPr/>
+        </p:nvSpPr>
+        <p:spPr>
+          <a:xfrm>
+            <a:off x="6949440" y="2560320"/>
+            <a:ext cx="2011680" cy="274320"/>
+          </a:xfrm>
+          <a:prstGeom prst="rect">
+            <a:avLst/>
+          </a:prstGeom>
+          <a:noFill/>
+          <a:ln/>
+        </p:spPr>
+        <p:txBody>
+          <a:bodyPr wrap="square" lIns="0" tIns="0" rIns="0" bIns="0" rtlCol="0" anchor="ctr"/>
+          <a:lstStyle/>
+          <a:p>
+            <a:pPr marL="0" indent="0">
+              <a:buNone/>
+            </a:pPr>
+            <a:r>
+              <a:rPr lang="en-US" sz="1200" dirty="0">
+                <a:solidFill>
+                  <a:srgbClr val="06B6D4"/>
                 </a:solidFill>
                 <a:latin typeface="Calibri" pitchFamily="34" charset="0"/>
                 <a:ea typeface="Calibri" pitchFamily="34" charset="-122"/>
                 <a:cs typeface="Calibri" pitchFamily="34" charset="-120"/>
-                <a:hlinkClick r:id="rId4" invalidUrl="" action="" tgtFrame="" tooltip="" history="1" highlightClick="0" endSnd="0">
+              </a:rPr>
+              <a:t>erickxllx@protonmail.com</a:t>
+            </a:r>
+            <a:endParaRPr lang="en-US" sz="1200" dirty="0"/>
+          </a:p>
+        </p:txBody>
+      </p:sp>
+      <p:sp>
+        <p:nvSpPr>
+          <p:cNvPr id="12" name="Shape 8"/>
+          <p:cNvSpPr/>
+          <p:nvPr/>
+        </p:nvSpPr>
+        <p:spPr>
+          <a:xfrm>
+            <a:off x="6309360" y="3383280"/>
+            <a:ext cx="2560320" cy="822960"/>
+          </a:xfrm>
+          <a:prstGeom prst="roundRect">
+            <a:avLst>
+              <a:gd name="adj" fmla="val 11111"/>
+            </a:avLst>
+          </a:prstGeom>
+          <a:solidFill>
+            <a:srgbClr val="0891B2"/>
+          </a:solidFill>
+          <a:ln/>
+        </p:spPr>
+        <p:txBody>
+          <a:bodyPr/>
+          <a:lstStyle/>
+          <a:p>
+            <a:endParaRPr lang="en-US"/>
+          </a:p>
+        </p:txBody>
+      </p:sp>
+      <p:sp>
+        <p:nvSpPr>
+          <p:cNvPr id="13" name="Text 9">
+            <a:hlinkClick r:id="rId6"/>
+          </p:cNvPr>
+          <p:cNvSpPr/>
+          <p:nvPr/>
+        </p:nvSpPr>
+        <p:spPr>
+          <a:xfrm>
+            <a:off x="6309360" y="3383280"/>
+            <a:ext cx="2560320" cy="822960"/>
+          </a:xfrm>
+          <a:prstGeom prst="rect">
+            <a:avLst/>
+          </a:prstGeom>
+          <a:noFill/>
+          <a:ln/>
+        </p:spPr>
+        <p:txBody>
+          <a:bodyPr wrap="square" lIns="0" tIns="0" rIns="0" bIns="0" rtlCol="0" anchor="ctr"/>
+          <a:lstStyle/>
+          <a:p>
+            <a:pPr marL="0" indent="0" algn="ctr">
+              <a:buNone/>
+            </a:pPr>
+            <a:r>
+              <a:rPr lang="en-US" sz="1200" b="1" u="sng" dirty="0">
+                <a:solidFill>
+                  <a:srgbClr val="FFFFFF"/>
+                </a:solidFill>
+                <a:latin typeface="Calibri" pitchFamily="34" charset="0"/>
+                <a:ea typeface="Calibri" pitchFamily="34" charset="-122"/>
+                <a:cs typeface="Calibri" pitchFamily="34" charset="-120"/>
+                <a:hlinkClick r:id="rId6">
+                  <a:extLst>
+                    <a:ext uri="{A12FA001-AC4F-418D-AE19-62706E023703}">
+                      <ahyp:hlinkClr xmlns:ahyp="http://schemas.microsoft.com/office/drawing/2018/hyperlinkcolor" val="tx"/>
+                    </a:ext>
+                  </a:extLst>
+                </a:hlinkClick>
+              </a:rPr>
+              <a:t>VIEW PORTFOLIO</a:t>
+            </a:r>
+            <a:endParaRPr lang="en-US" sz="1200" dirty="0"/>
+          </a:p>
+          <a:p>
+            <a:pPr marL="0" indent="0" algn="ctr">
+              <a:buNone/>
+            </a:pPr>
+            <a:r>
+              <a:rPr lang="en-US" sz="1200" b="1" u="sng" dirty="0">
+                <a:solidFill>
+                  <a:srgbClr val="FFFFFF"/>
+                </a:solidFill>
+                <a:latin typeface="Calibri" pitchFamily="34" charset="0"/>
+                <a:ea typeface="Calibri" pitchFamily="34" charset="-122"/>
+                <a:cs typeface="Calibri" pitchFamily="34" charset="-120"/>
+                <a:hlinkClick r:id="rId6">
                   <a:extLst>
                     <a:ext uri="{A12FA001-AC4F-418D-AE19-62706E023703}">
                       <ahyp:hlinkClr xmlns:ahyp="http://schemas.microsoft.com/office/drawing/2018/hyperlinkcolor" val="tx"/>
@@ -5212,4 +5256,319 @@
     </a:ext>
   </a:extLst>
 </a:theme>
+</file>
+
+<file path=ppt/theme/theme2.xml><?xml version="1.0" encoding="utf-8"?>
+<a:theme xmlns:a="http://schemas.openxmlformats.org/drawingml/2006/main" name="Office Theme">
+  <a:themeElements>
+    <a:clrScheme name="Office">
+      <a:dk1>
+        <a:sysClr val="windowText" lastClr="000000"/>
+      </a:dk1>
+      <a:lt1>
+        <a:sysClr val="window" lastClr="FFFFFF"/>
+      </a:lt1>
+      <a:dk2>
+        <a:srgbClr val="0E2841"/>
+      </a:dk2>
+      <a:lt2>
+        <a:srgbClr val="E8E8E8"/>
+      </a:lt2>
+      <a:accent1>
+        <a:srgbClr val="156082"/>
+      </a:accent1>
+      <a:accent2>
+        <a:srgbClr val="E97132"/>
+      </a:accent2>
+      <a:accent3>
+        <a:srgbClr val="196B24"/>
+      </a:accent3>
+      <a:accent4>
+        <a:srgbClr val="0F9ED5"/>
+      </a:accent4>
+      <a:accent5>
+        <a:srgbClr val="A02B93"/>
+      </a:accent5>
+      <a:accent6>
+        <a:srgbClr val="4EA72E"/>
+      </a:accent6>
+      <a:hlink>
+        <a:srgbClr val="467886"/>
+      </a:hlink>
+      <a:folHlink>
+        <a:srgbClr val="96607D"/>
+      </a:folHlink>
+    </a:clrScheme>
+    <a:fontScheme name="Office">
+      <a:majorFont>
+        <a:latin typeface="Aptos Display" panose="02110004020202020204"/>
+        <a:ea typeface=""/>
+        <a:cs typeface=""/>
+        <a:font script="Jpan" typeface="游ゴシック Light"/>
+        <a:font script="Hang" typeface="맑은 고딕"/>
+        <a:font script="Hans" typeface="等线 Light"/>
+        <a:font script="Hant" typeface="新細明體"/>
+        <a:font script="Arab" typeface="Times New Roman"/>
+        <a:font script="Hebr" typeface="Times New Roman"/>
+        <a:font script="Thai" typeface="Angsana New"/>
+        <a:font script="Ethi" typeface="Nyala"/>
+        <a:font script="Beng" typeface="Vrinda"/>
+        <a:font script="Gujr" typeface="Shruti"/>
+        <a:font script="Khmr" typeface="MoolBoran"/>
+        <a:font script="Knda" typeface="Tunga"/>
+        <a:font script="Guru" typeface="Raavi"/>
+        <a:font script="Cans" typeface="Euphemia"/>
+        <a:font script="Cher" typeface="Plantagenet Cherokee"/>
+        <a:font script="Yiii" typeface="Microsoft Yi Baiti"/>
+        <a:font script="Tibt" typeface="Microsoft Himalaya"/>
+        <a:font script="Thaa" typeface="MV Boli"/>
+        <a:font script="Deva" typeface="Mangal"/>
+        <a:font script="Telu" typeface="Gautami"/>
+        <a:font script="Taml" typeface="Latha"/>
+        <a:font script="Syrc" typeface="Estrangelo Edessa"/>
+        <a:font script="Orya" typeface="Kalinga"/>
+        <a:font script="Mlym" typeface="Kartika"/>
+        <a:font script="Laoo" typeface="DokChampa"/>
+        <a:font script="Sinh" typeface="Iskoola Pota"/>
+        <a:font script="Mong" typeface="Mongolian Baiti"/>
+        <a:font script="Viet" typeface="Times New Roman"/>
+        <a:font script="Uigh" typeface="Microsoft Uighur"/>
+        <a:font script="Geor" typeface="Sylfaen"/>
+        <a:font script="Armn" typeface="Arial"/>
+        <a:font script="Bugi" typeface="Leelawadee UI"/>
+        <a:font script="Bopo" typeface="Microsoft JhengHei"/>
+        <a:font script="Java" typeface="Javanese Text"/>
+        <a:font script="Lisu" typeface="Segoe UI"/>
+        <a:font script="Mymr" typeface="Myanmar Text"/>
+        <a:font script="Nkoo" typeface="Ebrima"/>
+        <a:font script="Olck" typeface="Nirmala UI"/>
+        <a:font script="Osma" typeface="Ebrima"/>
+        <a:font script="Phag" typeface="Phagspa"/>
+        <a:font script="Syrn" typeface="Estrangelo Edessa"/>
+        <a:font script="Syrj" typeface="Estrangelo Edessa"/>
+        <a:font script="Syre" typeface="Estrangelo Edessa"/>
+        <a:font script="Sora" typeface="Nirmala UI"/>
+        <a:font script="Tale" typeface="Microsoft Tai Le"/>
+        <a:font script="Talu" typeface="Microsoft New Tai Lue"/>
+        <a:font script="Tfng" typeface="Ebrima"/>
+      </a:majorFont>
+      <a:minorFont>
+        <a:latin typeface="Aptos" panose="02110004020202020204"/>
+        <a:ea typeface=""/>
+        <a:cs typeface=""/>
+        <a:font script="Jpan" typeface="游ゴシック"/>
+        <a:font script="Hang" typeface="맑은 고딕"/>
+        <a:font script="Hans" typeface="等线"/>
+        <a:font script="Hant" typeface="新細明體"/>
+        <a:font script="Arab" typeface="Arial"/>
+        <a:font script="Hebr" typeface="Arial"/>
+        <a:font script="Thai" typeface="Cordia New"/>
+        <a:font script="Ethi" typeface="Nyala"/>
+        <a:font script="Beng" typeface="Vrinda"/>
+        <a:font script="Gujr" typeface="Shruti"/>
+        <a:font script="Khmr" typeface="DaunPenh"/>
+        <a:font script="Knda" typeface="Tunga"/>
+        <a:font script="Guru" typeface="Raavi"/>
+        <a:font script="Cans" typeface="Euphemia"/>
+        <a:font script="Cher" typeface="Plantagenet Cherokee"/>
+        <a:font script="Yiii" typeface="Microsoft Yi Baiti"/>
+        <a:font script="Tibt" typeface="Microsoft Himalaya"/>
+        <a:font script="Thaa" typeface="MV Boli"/>
+        <a:font script="Deva" typeface="Mangal"/>
+        <a:font script="Telu" typeface="Gautami"/>
+        <a:font script="Taml" typeface="Latha"/>
+        <a:font script="Syrc" typeface="Estrangelo Edessa"/>
+        <a:font script="Orya" typeface="Kalinga"/>
+        <a:font script="Mlym" typeface="Kartika"/>
+        <a:font script="Laoo" typeface="DokChampa"/>
+        <a:font script="Sinh" typeface="Iskoola Pota"/>
+        <a:font script="Mong" typeface="Mongolian Baiti"/>
+        <a:font script="Viet" typeface="Arial"/>
+        <a:font script="Uigh" typeface="Microsoft Uighur"/>
+        <a:font script="Geor" typeface="Sylfaen"/>
+        <a:font script="Armn" typeface="Arial"/>
+        <a:font script="Bugi" typeface="Leelawadee UI"/>
+        <a:font script="Bopo" typeface="Microsoft JhengHei"/>
+        <a:font script="Java" typeface="Javanese Text"/>
+        <a:font script="Lisu" typeface="Segoe UI"/>
+        <a:font script="Mymr" typeface="Myanmar Text"/>
+        <a:font script="Nkoo" typeface="Ebrima"/>
+        <a:font script="Olck" typeface="Nirmala UI"/>
+        <a:font script="Osma" typeface="Ebrima"/>
+        <a:font script="Phag" typeface="Phagspa"/>
+        <a:font script="Syrn" typeface="Estrangelo Edessa"/>
+        <a:font script="Syrj" typeface="Estrangelo Edessa"/>
+        <a:font script="Syre" typeface="Estrangelo Edessa"/>
+        <a:font script="Sora" typeface="Nirmala UI"/>
+        <a:font script="Tale" typeface="Microsoft Tai Le"/>
+        <a:font script="Talu" typeface="Microsoft New Tai Lue"/>
+        <a:font script="Tfng" typeface="Ebrima"/>
+      </a:minorFont>
+    </a:fontScheme>
+    <a:fmtScheme name="Office">
+      <a:fillStyleLst>
+        <a:solidFill>
+          <a:schemeClr val="phClr"/>
+        </a:solidFill>
+        <a:gradFill rotWithShape="1">
+          <a:gsLst>
+            <a:gs pos="0">
+              <a:schemeClr val="phClr">
+                <a:lumMod val="110000"/>
+                <a:satMod val="105000"/>
+                <a:tint val="67000"/>
+              </a:schemeClr>
+            </a:gs>
+            <a:gs pos="50000">
+              <a:schemeClr val="phClr">
+                <a:lumMod val="105000"/>
+                <a:satMod val="103000"/>
+                <a:tint val="73000"/>
+              </a:schemeClr>
+            </a:gs>
+            <a:gs pos="100000">
+              <a:schemeClr val="phClr">
+                <a:lumMod val="105000"/>
+                <a:satMod val="109000"/>
+                <a:tint val="81000"/>
+              </a:schemeClr>
+            </a:gs>
+          </a:gsLst>
+          <a:lin ang="5400000" scaled="0"/>
+        </a:gradFill>
+        <a:gradFill rotWithShape="1">
+          <a:gsLst>
+            <a:gs pos="0">
+              <a:schemeClr val="phClr">
+                <a:satMod val="103000"/>
+                <a:lumMod val="102000"/>
+                <a:tint val="94000"/>
+              </a:schemeClr>
+            </a:gs>
+            <a:gs pos="50000">
+              <a:schemeClr val="phClr">
+                <a:satMod val="110000"/>
+                <a:lumMod val="100000"/>
+                <a:shade val="100000"/>
+              </a:schemeClr>
+            </a:gs>
+            <a:gs pos="100000">
+              <a:schemeClr val="phClr">
+                <a:lumMod val="99000"/>
+                <a:satMod val="120000"/>
+                <a:shade val="78000"/>
+              </a:schemeClr>
+            </a:gs>
+          </a:gsLst>
+          <a:lin ang="5400000" scaled="0"/>
+        </a:gradFill>
+      </a:fillStyleLst>
+      <a:lnStyleLst>
+        <a:ln w="12700" cap="flat" cmpd="sng" algn="ctr">
+          <a:solidFill>
+            <a:schemeClr val="phClr"/>
+          </a:solidFill>
+          <a:prstDash val="solid"/>
+          <a:miter lim="800000"/>
+        </a:ln>
+        <a:ln w="19050" cap="flat" cmpd="sng" algn="ctr">
+          <a:solidFill>
+            <a:schemeClr val="phClr"/>
+          </a:solidFill>
+          <a:prstDash val="solid"/>
+          <a:miter lim="800000"/>
+        </a:ln>
+        <a:ln w="25400" cap="flat" cmpd="sng" algn="ctr">
+          <a:solidFill>
+            <a:schemeClr val="phClr"/>
+          </a:solidFill>
+          <a:prstDash val="solid"/>
+          <a:miter lim="800000"/>
+        </a:ln>
+      </a:lnStyleLst>
+      <a:effectStyleLst>
+        <a:effectStyle>
+          <a:effectLst/>
+        </a:effectStyle>
+        <a:effectStyle>
+          <a:effectLst/>
+        </a:effectStyle>
+        <a:effectStyle>
+          <a:effectLst>
+            <a:outerShdw blurRad="57150" dist="19050" dir="5400000" algn="ctr" rotWithShape="0">
+              <a:srgbClr val="000000">
+                <a:alpha val="63000"/>
+              </a:srgbClr>
+            </a:outerShdw>
+          </a:effectLst>
+        </a:effectStyle>
+      </a:effectStyleLst>
+      <a:bgFillStyleLst>
+        <a:solidFill>
+          <a:schemeClr val="phClr"/>
+        </a:solidFill>
+        <a:solidFill>
+          <a:schemeClr val="phClr">
+            <a:tint val="95000"/>
+            <a:satMod val="170000"/>
+          </a:schemeClr>
+        </a:solidFill>
+        <a:gradFill rotWithShape="1">
+          <a:gsLst>
+            <a:gs pos="0">
+              <a:schemeClr val="phClr">
+                <a:tint val="93000"/>
+                <a:satMod val="150000"/>
+                <a:shade val="98000"/>
+                <a:lumMod val="102000"/>
+              </a:schemeClr>
+            </a:gs>
+            <a:gs pos="50000">
+              <a:schemeClr val="phClr">
+                <a:tint val="98000"/>
+                <a:satMod val="130000"/>
+                <a:shade val="90000"/>
+                <a:lumMod val="103000"/>
+              </a:schemeClr>
+            </a:gs>
+            <a:gs pos="100000">
+              <a:schemeClr val="phClr">
+                <a:shade val="63000"/>
+                <a:satMod val="120000"/>
+              </a:schemeClr>
+            </a:gs>
+          </a:gsLst>
+          <a:lin ang="5400000" scaled="0"/>
+        </a:gradFill>
+      </a:bgFillStyleLst>
+    </a:fmtScheme>
+  </a:themeElements>
+  <a:objectDefaults>
+    <a:lnDef>
+      <a:spPr/>
+      <a:bodyPr/>
+      <a:lstStyle/>
+      <a:style>
+        <a:lnRef idx="2">
+          <a:schemeClr val="accent1"/>
+        </a:lnRef>
+        <a:fillRef idx="0">
+          <a:schemeClr val="accent1"/>
+        </a:fillRef>
+        <a:effectRef idx="1">
+          <a:schemeClr val="accent1"/>
+        </a:effectRef>
+        <a:fontRef idx="minor">
+          <a:schemeClr val="tx1"/>
+        </a:fontRef>
+      </a:style>
+    </a:lnDef>
+  </a:objectDefaults>
+  <a:extraClrSchemeLst/>
+  <a:extLst>
+    <a:ext uri="{05A4C25C-085E-4340-85A3-A5531E510DB2}">
+      <thm15:themeFamily xmlns:thm15="http://schemas.microsoft.com/office/thememl/2012/main" name="Office Theme" id="{2E142A2C-CD16-42D6-873A-C26D2A0506FA}" vid="{1BDDFF52-6CD6-40A5-AB3C-68EB2F1E4D0A}"/>
+    </a:ext>
+  </a:extLst>
+</a:theme>
 </file>